--- a/pitch-presentations/documents/must_ppt.pptx
+++ b/pitch-presentations/documents/must_ppt.pptx
@@ -4908,8 +4908,62 @@
         </p:nvSpPr>
         <p:spPr>
           <a:xfrm>
-            <a:off x="502920" y="146304"/>
-            <a:ext cx="9845942" cy="292608"/>
+            <a:off x="502920" y="256032"/>
+            <a:ext cx="9845942" cy="566928"/>
+          </a:xfrm>
+          <a:prstGeom prst="rect">
+            <a:avLst/>
+          </a:prstGeom>
+          <a:noFill/>
+        </p:spPr>
+        <p:txBody>
+          <a:bodyPr wrap="square" lIns="18000" rIns="18000" tIns="4000" bIns="4000" anchor="ctr">
+            <a:spAutoFit/>
+          </a:bodyPr>
+          <a:lstStyle/>
+          <a:p>
+            <a:pPr algn="l">
+              <a:lnSpc>
+                <a:spcPct val="115000"/>
+              </a:lnSpc>
+              <a:spcBef>
+                <a:spcPts val="0"/>
+              </a:spcBef>
+              <a:spcAft>
+                <a:spcPts val="0"/>
+              </a:spcAft>
+            </a:pPr>
+            <a:r>
+              <a:rPr sz="2800" b="1">
+                <a:solidFill>
+                  <a:srgbClr val="C45C26"/>
+                </a:solidFill>
+                <a:latin typeface="Calibri"/>
+              </a:rPr>
+              <a:t>Purpose: </a:t>
+            </a:r>
+            <a:r>
+              <a:rPr sz="2800" b="1">
+                <a:solidFill>
+                  <a:srgbClr val="0A1F2E"/>
+                </a:solidFill>
+                <a:latin typeface="Calibri"/>
+              </a:rPr>
+              <a:t>Why we are here</a:t>
+            </a:r>
+          </a:p>
+        </p:txBody>
+      </p:sp>
+      <p:sp>
+        <p:nvSpPr>
+          <p:cNvPr id="8" name="TextBox 7"/>
+          <p:cNvSpPr txBox="1"/>
+          <p:nvPr/>
+        </p:nvSpPr>
+        <p:spPr>
+          <a:xfrm>
+            <a:off x="502920" y="960120"/>
+            <a:ext cx="11185855" cy="1097280"/>
           </a:xfrm>
           <a:prstGeom prst="rect">
             <a:avLst/>
@@ -4930,42 +4984,19 @@
                 <a:spcPts val="0"/>
               </a:spcBef>
               <a:spcAft>
-                <a:spcPts val="0"/>
+                <a:spcPts val="1000"/>
               </a:spcAft>
             </a:pPr>
             <a:r>
-              <a:rPr sz="1700" b="1">
-                <a:solidFill>
-                  <a:srgbClr val="C45C26"/>
-                </a:solidFill>
-                <a:latin typeface="Calibri"/>
-              </a:rPr>
-              <a:t>PURPOSE</a:t>
-            </a:r>
-          </a:p>
-        </p:txBody>
-      </p:sp>
-      <p:sp>
-        <p:nvSpPr>
-          <p:cNvPr id="8" name="TextBox 7"/>
-          <p:cNvSpPr txBox="1"/>
-          <p:nvPr/>
-        </p:nvSpPr>
-        <p:spPr>
-          <a:xfrm>
-            <a:off x="502920" y="402336"/>
-            <a:ext cx="9845942" cy="530352"/>
-          </a:xfrm>
-          <a:prstGeom prst="rect">
-            <a:avLst/>
-          </a:prstGeom>
-          <a:noFill/>
-        </p:spPr>
-        <p:txBody>
-          <a:bodyPr wrap="square" lIns="22000" rIns="22000" tIns="8000" bIns="8000" anchor="t">
-            <a:spAutoFit/>
-          </a:bodyPr>
-          <a:lstStyle/>
+              <a:rPr sz="2200" b="0">
+                <a:solidFill>
+                  <a:srgbClr val="1E2F38"/>
+                </a:solidFill>
+                <a:latin typeface="Calibri"/>
+              </a:rPr>
+              <a:t>FairBanks Medical Centre seeks a practical partnership with MUST —</a:t>
+            </a:r>
+          </a:p>
           <a:p>
             <a:pPr algn="l">
               <a:lnSpc>
@@ -4975,42 +5006,19 @@
                 <a:spcPts val="0"/>
               </a:spcBef>
               <a:spcAft>
-                <a:spcPts val="0"/>
+                <a:spcPts val="1000"/>
               </a:spcAft>
             </a:pPr>
             <a:r>
-              <a:rPr sz="3200" b="1">
-                <a:solidFill>
-                  <a:srgbClr val="0A1F2E"/>
-                </a:solidFill>
-                <a:latin typeface="Calibri"/>
-              </a:rPr>
-              <a:t>Why we are here</a:t>
-            </a:r>
-          </a:p>
-        </p:txBody>
-      </p:sp>
-      <p:sp>
-        <p:nvSpPr>
-          <p:cNvPr id="9" name="TextBox 8"/>
-          <p:cNvSpPr txBox="1"/>
-          <p:nvPr/>
-        </p:nvSpPr>
-        <p:spPr>
-          <a:xfrm>
-            <a:off x="502920" y="1097280"/>
-            <a:ext cx="11185855" cy="1097280"/>
-          </a:xfrm>
-          <a:prstGeom prst="rect">
-            <a:avLst/>
-          </a:prstGeom>
-          <a:noFill/>
-        </p:spPr>
-        <p:txBody>
-          <a:bodyPr wrap="square" lIns="22000" rIns="22000" tIns="8000" bIns="8000" anchor="t">
-            <a:spAutoFit/>
-          </a:bodyPr>
-          <a:lstStyle/>
+              <a:rPr sz="2200" b="0">
+                <a:solidFill>
+                  <a:srgbClr val="1E2F38"/>
+                </a:solidFill>
+                <a:latin typeface="Calibri"/>
+              </a:rPr>
+              <a:t>linking a working clinic and community programmes with university teaching,</a:t>
+            </a:r>
+          </a:p>
           <a:p>
             <a:pPr algn="l">
               <a:lnSpc>
@@ -5030,50 +5038,6 @@
                 </a:solidFill>
                 <a:latin typeface="Calibri"/>
               </a:rPr>
-              <a:t>FairBanks Medical Centre seeks a practical partnership with MUST —</a:t>
-            </a:r>
-          </a:p>
-          <a:p>
-            <a:pPr algn="l">
-              <a:lnSpc>
-                <a:spcPct val="150000"/>
-              </a:lnSpc>
-              <a:spcBef>
-                <a:spcPts val="0"/>
-              </a:spcBef>
-              <a:spcAft>
-                <a:spcPts val="1000"/>
-              </a:spcAft>
-            </a:pPr>
-            <a:r>
-              <a:rPr sz="2200" b="0">
-                <a:solidFill>
-                  <a:srgbClr val="1E2F38"/>
-                </a:solidFill>
-                <a:latin typeface="Calibri"/>
-              </a:rPr>
-              <a:t>linking a working clinic and community programmes with university teaching,</a:t>
-            </a:r>
-          </a:p>
-          <a:p>
-            <a:pPr algn="l">
-              <a:lnSpc>
-                <a:spcPct val="150000"/>
-              </a:lnSpc>
-              <a:spcBef>
-                <a:spcPts val="0"/>
-              </a:spcBef>
-              <a:spcAft>
-                <a:spcPts val="1000"/>
-              </a:spcAft>
-            </a:pPr>
-            <a:r>
-              <a:rPr sz="2200" b="0">
-                <a:solidFill>
-                  <a:srgbClr val="1E2F38"/>
-                </a:solidFill>
-                <a:latin typeface="Calibri"/>
-              </a:rPr>
               <a:t>research, innovation, and grant writing.</a:t>
             </a:r>
           </a:p>
@@ -5081,14 +5045,14 @@
       </p:sp>
       <p:sp>
         <p:nvSpPr>
-          <p:cNvPr id="10" name="Rounded Rectangle 9"/>
+          <p:cNvPr id="9" name="Rounded Rectangle 8"/>
           <p:cNvSpPr/>
           <p:nvPr/>
         </p:nvSpPr>
         <p:spPr>
           <a:xfrm>
-            <a:off x="502920" y="2331720"/>
-            <a:ext cx="11185855" cy="1155192"/>
+            <a:off x="502920" y="2194560"/>
+            <a:ext cx="11185855" cy="1200912"/>
           </a:xfrm>
           <a:prstGeom prst="roundRect">
             <a:avLst>
@@ -5129,14 +5093,14 @@
       </p:sp>
       <p:sp>
         <p:nvSpPr>
-          <p:cNvPr id="11" name="Rectangle 10"/>
+          <p:cNvPr id="10" name="Rectangle 9"/>
           <p:cNvSpPr/>
           <p:nvPr/>
         </p:nvSpPr>
         <p:spPr>
           <a:xfrm>
-            <a:off x="667512" y="2459736"/>
-            <a:ext cx="91440" cy="899160"/>
+            <a:off x="667512" y="2322576"/>
+            <a:ext cx="91440" cy="944879"/>
           </a:xfrm>
           <a:prstGeom prst="rect">
             <a:avLst/>
@@ -5173,13 +5137,13 @@
       </p:sp>
       <p:sp>
         <p:nvSpPr>
-          <p:cNvPr id="12" name="TextBox 11"/>
+          <p:cNvPr id="11" name="TextBox 10"/>
           <p:cNvSpPr txBox="1"/>
           <p:nvPr/>
         </p:nvSpPr>
         <p:spPr>
           <a:xfrm>
-            <a:off x="914400" y="2441448"/>
+            <a:off x="914400" y="2304288"/>
             <a:ext cx="10500055" cy="384048"/>
           </a:xfrm>
           <a:prstGeom prst="rect">
@@ -5218,14 +5182,14 @@
       </p:sp>
       <p:sp>
         <p:nvSpPr>
-          <p:cNvPr id="13" name="TextBox 12"/>
+          <p:cNvPr id="12" name="TextBox 11"/>
           <p:cNvSpPr txBox="1"/>
           <p:nvPr/>
         </p:nvSpPr>
         <p:spPr>
           <a:xfrm>
-            <a:off x="914400" y="2862072"/>
-            <a:ext cx="10500055" cy="496824"/>
+            <a:off x="914400" y="2724912"/>
+            <a:ext cx="10500055" cy="542543"/>
           </a:xfrm>
           <a:prstGeom prst="rect">
             <a:avLst/>
@@ -5263,14 +5227,14 @@
       </p:sp>
       <p:sp>
         <p:nvSpPr>
-          <p:cNvPr id="14" name="Rounded Rectangle 13"/>
+          <p:cNvPr id="13" name="Rounded Rectangle 12"/>
           <p:cNvSpPr/>
           <p:nvPr/>
         </p:nvSpPr>
         <p:spPr>
           <a:xfrm>
-            <a:off x="502920" y="3614928"/>
-            <a:ext cx="11185855" cy="1155192"/>
+            <a:off x="502920" y="3523488"/>
+            <a:ext cx="11185855" cy="1200912"/>
           </a:xfrm>
           <a:prstGeom prst="roundRect">
             <a:avLst>
@@ -5311,14 +5275,14 @@
       </p:sp>
       <p:sp>
         <p:nvSpPr>
-          <p:cNvPr id="15" name="Rectangle 14"/>
+          <p:cNvPr id="14" name="Rectangle 13"/>
           <p:cNvSpPr/>
           <p:nvPr/>
         </p:nvSpPr>
         <p:spPr>
           <a:xfrm>
-            <a:off x="667512" y="3742943"/>
-            <a:ext cx="91440" cy="899160"/>
+            <a:off x="667512" y="3651504"/>
+            <a:ext cx="91440" cy="944879"/>
           </a:xfrm>
           <a:prstGeom prst="rect">
             <a:avLst/>
@@ -5355,13 +5319,13 @@
       </p:sp>
       <p:sp>
         <p:nvSpPr>
-          <p:cNvPr id="16" name="TextBox 15"/>
+          <p:cNvPr id="15" name="TextBox 14"/>
           <p:cNvSpPr txBox="1"/>
           <p:nvPr/>
         </p:nvSpPr>
         <p:spPr>
           <a:xfrm>
-            <a:off x="914400" y="3724656"/>
+            <a:off x="914400" y="3633216"/>
             <a:ext cx="10500055" cy="384048"/>
           </a:xfrm>
           <a:prstGeom prst="rect">
@@ -5400,14 +5364,14 @@
       </p:sp>
       <p:sp>
         <p:nvSpPr>
-          <p:cNvPr id="17" name="TextBox 16"/>
+          <p:cNvPr id="16" name="TextBox 15"/>
           <p:cNvSpPr txBox="1"/>
           <p:nvPr/>
         </p:nvSpPr>
         <p:spPr>
           <a:xfrm>
-            <a:off x="914400" y="4145280"/>
-            <a:ext cx="10500055" cy="496824"/>
+            <a:off x="914400" y="4053840"/>
+            <a:ext cx="10500055" cy="542543"/>
           </a:xfrm>
           <a:prstGeom prst="rect">
             <a:avLst/>
@@ -5445,14 +5409,14 @@
       </p:sp>
       <p:sp>
         <p:nvSpPr>
-          <p:cNvPr id="18" name="Rounded Rectangle 17"/>
+          <p:cNvPr id="17" name="Rounded Rectangle 16"/>
           <p:cNvSpPr/>
           <p:nvPr/>
         </p:nvSpPr>
         <p:spPr>
           <a:xfrm>
-            <a:off x="502920" y="4898136"/>
-            <a:ext cx="11185855" cy="1155192"/>
+            <a:off x="502920" y="4852416"/>
+            <a:ext cx="11185855" cy="1200912"/>
           </a:xfrm>
           <a:prstGeom prst="roundRect">
             <a:avLst>
@@ -5493,14 +5457,14 @@
       </p:sp>
       <p:sp>
         <p:nvSpPr>
-          <p:cNvPr id="19" name="Rectangle 18"/>
+          <p:cNvPr id="18" name="Rectangle 17"/>
           <p:cNvSpPr/>
           <p:nvPr/>
         </p:nvSpPr>
         <p:spPr>
           <a:xfrm>
-            <a:off x="667512" y="5026151"/>
-            <a:ext cx="91440" cy="899160"/>
+            <a:off x="667512" y="4980432"/>
+            <a:ext cx="91440" cy="944879"/>
           </a:xfrm>
           <a:prstGeom prst="rect">
             <a:avLst/>
@@ -5537,13 +5501,13 @@
       </p:sp>
       <p:sp>
         <p:nvSpPr>
-          <p:cNvPr id="20" name="TextBox 19"/>
+          <p:cNvPr id="19" name="TextBox 18"/>
           <p:cNvSpPr txBox="1"/>
           <p:nvPr/>
         </p:nvSpPr>
         <p:spPr>
           <a:xfrm>
-            <a:off x="914400" y="5007864"/>
+            <a:off x="914400" y="4962144"/>
             <a:ext cx="10500055" cy="384048"/>
           </a:xfrm>
           <a:prstGeom prst="rect">
@@ -5582,14 +5546,14 @@
       </p:sp>
       <p:sp>
         <p:nvSpPr>
-          <p:cNvPr id="21" name="TextBox 20"/>
+          <p:cNvPr id="20" name="TextBox 19"/>
           <p:cNvSpPr txBox="1"/>
           <p:nvPr/>
         </p:nvSpPr>
         <p:spPr>
           <a:xfrm>
-            <a:off x="914400" y="5428488"/>
-            <a:ext cx="10500055" cy="496824"/>
+            <a:off x="914400" y="5382768"/>
+            <a:ext cx="10500055" cy="542543"/>
           </a:xfrm>
           <a:prstGeom prst="rect">
             <a:avLst/>
@@ -5627,7 +5591,7 @@
       </p:sp>
       <p:sp>
         <p:nvSpPr>
-          <p:cNvPr id="22" name="Rectangle 21"/>
+          <p:cNvPr id="21" name="Rectangle 20"/>
           <p:cNvSpPr/>
           <p:nvPr/>
         </p:nvSpPr>
@@ -5671,7 +5635,7 @@
       </p:sp>
       <p:sp>
         <p:nvSpPr>
-          <p:cNvPr id="23" name="TextBox 22"/>
+          <p:cNvPr id="22" name="TextBox 21"/>
           <p:cNvSpPr txBox="1"/>
           <p:nvPr/>
         </p:nvSpPr>
@@ -5716,7 +5680,7 @@
       </p:sp>
       <p:sp>
         <p:nvSpPr>
-          <p:cNvPr id="24" name="TextBox 23"/>
+          <p:cNvPr id="23" name="TextBox 22"/>
           <p:cNvSpPr txBox="1"/>
           <p:nvPr/>
         </p:nvSpPr>
@@ -5992,8 +5956,8 @@
         </p:nvSpPr>
         <p:spPr>
           <a:xfrm>
-            <a:off x="502920" y="146304"/>
-            <a:ext cx="9845942" cy="292608"/>
+            <a:off x="502920" y="256032"/>
+            <a:ext cx="9845942" cy="566928"/>
           </a:xfrm>
           <a:prstGeom prst="rect">
             <a:avLst/>
@@ -6001,14 +5965,14 @@
           <a:noFill/>
         </p:spPr>
         <p:txBody>
-          <a:bodyPr wrap="square" lIns="22000" rIns="22000" tIns="8000" bIns="8000" anchor="t">
+          <a:bodyPr wrap="square" lIns="18000" rIns="18000" tIns="4000" bIns="4000" anchor="ctr">
             <a:spAutoFit/>
           </a:bodyPr>
           <a:lstStyle/>
           <a:p>
             <a:pPr algn="l">
               <a:lnSpc>
-                <a:spcPct val="150000"/>
+                <a:spcPct val="115000"/>
               </a:lnSpc>
               <a:spcBef>
                 <a:spcPts val="0"/>
@@ -6018,52 +5982,16 @@
               </a:spcAft>
             </a:pPr>
             <a:r>
-              <a:rPr sz="1700" b="1">
+              <a:rPr sz="2800" b="1">
                 <a:solidFill>
                   <a:srgbClr val="C45C26"/>
                 </a:solidFill>
                 <a:latin typeface="Calibri"/>
               </a:rPr>
-              <a:t>WHO WE ARE</a:t>
-            </a:r>
-          </a:p>
-        </p:txBody>
-      </p:sp>
-      <p:sp>
-        <p:nvSpPr>
-          <p:cNvPr id="8" name="TextBox 7"/>
-          <p:cNvSpPr txBox="1"/>
-          <p:nvPr/>
-        </p:nvSpPr>
-        <p:spPr>
-          <a:xfrm>
-            <a:off x="502920" y="402336"/>
-            <a:ext cx="9845942" cy="530352"/>
-          </a:xfrm>
-          <a:prstGeom prst="rect">
-            <a:avLst/>
-          </a:prstGeom>
-          <a:noFill/>
-        </p:spPr>
-        <p:txBody>
-          <a:bodyPr wrap="square" lIns="22000" rIns="22000" tIns="8000" bIns="8000" anchor="t">
-            <a:spAutoFit/>
-          </a:bodyPr>
-          <a:lstStyle/>
-          <a:p>
-            <a:pPr algn="l">
-              <a:lnSpc>
-                <a:spcPct val="150000"/>
-              </a:lnSpc>
-              <a:spcBef>
-                <a:spcPts val="0"/>
-              </a:spcBef>
-              <a:spcAft>
-                <a:spcPts val="0"/>
-              </a:spcAft>
-            </a:pPr>
-            <a:r>
-              <a:rPr sz="3200" b="1">
+              <a:t>Who we are: </a:t>
+            </a:r>
+            <a:r>
+              <a:rPr sz="2800" b="1">
                 <a:solidFill>
                   <a:srgbClr val="0A1F2E"/>
                 </a:solidFill>
@@ -6076,14 +6004,14 @@
       </p:sp>
       <p:sp>
         <p:nvSpPr>
-          <p:cNvPr id="9" name="Rounded Rectangle 8"/>
+          <p:cNvPr id="8" name="Rounded Rectangle 7"/>
           <p:cNvSpPr/>
           <p:nvPr/>
         </p:nvSpPr>
         <p:spPr>
           <a:xfrm>
-            <a:off x="502920" y="1097280"/>
-            <a:ext cx="6537960" cy="4956048"/>
+            <a:off x="502920" y="960120"/>
+            <a:ext cx="6537960" cy="5093208"/>
           </a:xfrm>
           <a:prstGeom prst="roundRect">
             <a:avLst>
@@ -6124,13 +6052,13 @@
       </p:sp>
       <p:sp>
         <p:nvSpPr>
-          <p:cNvPr id="10" name="TextBox 9"/>
+          <p:cNvPr id="9" name="TextBox 8"/>
           <p:cNvSpPr txBox="1"/>
           <p:nvPr/>
         </p:nvSpPr>
         <p:spPr>
           <a:xfrm>
-            <a:off x="822960" y="1353312"/>
+            <a:off x="822960" y="1216152"/>
             <a:ext cx="5897880" cy="384048"/>
           </a:xfrm>
           <a:prstGeom prst="rect">
@@ -6169,13 +6097,13 @@
       </p:sp>
       <p:sp>
         <p:nvSpPr>
-          <p:cNvPr id="11" name="TextBox 10"/>
+          <p:cNvPr id="10" name="TextBox 9"/>
           <p:cNvSpPr txBox="1"/>
           <p:nvPr/>
         </p:nvSpPr>
         <p:spPr>
           <a:xfrm>
-            <a:off x="822960" y="1783080"/>
+            <a:off x="822960" y="1645920"/>
             <a:ext cx="5897880" cy="310896"/>
           </a:xfrm>
           <a:prstGeom prst="rect">
@@ -6214,14 +6142,14 @@
       </p:sp>
       <p:sp>
         <p:nvSpPr>
-          <p:cNvPr id="12" name="TextBox 11"/>
+          <p:cNvPr id="11" name="TextBox 10"/>
           <p:cNvSpPr txBox="1"/>
           <p:nvPr/>
         </p:nvSpPr>
         <p:spPr>
           <a:xfrm>
-            <a:off x="822960" y="2240280"/>
-            <a:ext cx="5897880" cy="3584448"/>
+            <a:off x="822960" y="2103120"/>
+            <a:ext cx="5897880" cy="3721608"/>
           </a:xfrm>
           <a:prstGeom prst="rect">
             <a:avLst/>
@@ -6347,7 +6275,7 @@
       </p:sp>
       <p:pic>
         <p:nvPicPr>
-          <p:cNvPr id="13" name="Picture 12" descr="facility_exterior_entrance_01.jpg"/>
+          <p:cNvPr id="12" name="Picture 11" descr="facility_exterior_entrance_01.jpg"/>
           <p:cNvPicPr>
             <a:picLocks noChangeAspect="1"/>
           </p:cNvPicPr>
@@ -6355,15 +6283,15 @@
         </p:nvPicPr>
         <p:blipFill>
           <a:blip r:embed="rId3"/>
-          <a:srcRect t="1120" b="1120"/>
+          <a:srcRect l="232" r="232"/>
           <a:stretch>
             <a:fillRect/>
           </a:stretch>
         </p:blipFill>
         <p:spPr>
           <a:xfrm>
-            <a:off x="7278624" y="1097280"/>
-            <a:ext cx="4410151" cy="2874507"/>
+            <a:off x="7278624" y="960120"/>
+            <a:ext cx="4410151" cy="2954060"/>
           </a:xfrm>
           <a:prstGeom prst="rect">
             <a:avLst/>
@@ -6372,14 +6300,14 @@
       </p:pic>
       <p:sp>
         <p:nvSpPr>
-          <p:cNvPr id="14" name="Rounded Rectangle 13"/>
+          <p:cNvPr id="13" name="Rounded Rectangle 12"/>
           <p:cNvSpPr/>
           <p:nvPr/>
         </p:nvSpPr>
         <p:spPr>
           <a:xfrm>
-            <a:off x="7278624" y="4099803"/>
-            <a:ext cx="4410151" cy="1953524"/>
+            <a:off x="7278624" y="4042196"/>
+            <a:ext cx="4410151" cy="2011131"/>
           </a:xfrm>
           <a:prstGeom prst="roundRect">
             <a:avLst>
@@ -6418,13 +6346,13 @@
       </p:sp>
       <p:sp>
         <p:nvSpPr>
-          <p:cNvPr id="15" name="TextBox 14"/>
+          <p:cNvPr id="14" name="TextBox 13"/>
           <p:cNvSpPr txBox="1"/>
           <p:nvPr/>
         </p:nvSpPr>
         <p:spPr>
           <a:xfrm>
-            <a:off x="7479792" y="4282683"/>
+            <a:off x="7479792" y="4225076"/>
             <a:ext cx="4007815" cy="329184"/>
           </a:xfrm>
           <a:prstGeom prst="rect">
@@ -6463,14 +6391,14 @@
       </p:sp>
       <p:sp>
         <p:nvSpPr>
-          <p:cNvPr id="16" name="TextBox 15"/>
+          <p:cNvPr id="15" name="TextBox 14"/>
           <p:cNvSpPr txBox="1"/>
           <p:nvPr/>
         </p:nvSpPr>
         <p:spPr>
           <a:xfrm>
-            <a:off x="7479792" y="4648443"/>
-            <a:ext cx="4007815" cy="1222004"/>
+            <a:off x="7479792" y="4590836"/>
+            <a:ext cx="4007815" cy="1279611"/>
           </a:xfrm>
           <a:prstGeom prst="rect">
             <a:avLst/>
@@ -6530,7 +6458,7 @@
       </p:sp>
       <p:sp>
         <p:nvSpPr>
-          <p:cNvPr id="17" name="Rectangle 16"/>
+          <p:cNvPr id="16" name="Rectangle 15"/>
           <p:cNvSpPr/>
           <p:nvPr/>
         </p:nvSpPr>
@@ -6574,7 +6502,7 @@
       </p:sp>
       <p:sp>
         <p:nvSpPr>
-          <p:cNvPr id="18" name="TextBox 17"/>
+          <p:cNvPr id="17" name="TextBox 16"/>
           <p:cNvSpPr txBox="1"/>
           <p:nvPr/>
         </p:nvSpPr>
@@ -6619,7 +6547,7 @@
       </p:sp>
       <p:sp>
         <p:nvSpPr>
-          <p:cNvPr id="19" name="TextBox 18"/>
+          <p:cNvPr id="18" name="TextBox 17"/>
           <p:cNvSpPr txBox="1"/>
           <p:nvPr/>
         </p:nvSpPr>
@@ -6895,8 +6823,62 @@
         </p:nvSpPr>
         <p:spPr>
           <a:xfrm>
-            <a:off x="502920" y="146304"/>
-            <a:ext cx="9845942" cy="292608"/>
+            <a:off x="502920" y="256032"/>
+            <a:ext cx="9845942" cy="566928"/>
+          </a:xfrm>
+          <a:prstGeom prst="rect">
+            <a:avLst/>
+          </a:prstGeom>
+          <a:noFill/>
+        </p:spPr>
+        <p:txBody>
+          <a:bodyPr wrap="square" lIns="18000" rIns="18000" tIns="4000" bIns="4000" anchor="ctr">
+            <a:spAutoFit/>
+          </a:bodyPr>
+          <a:lstStyle/>
+          <a:p>
+            <a:pPr algn="l">
+              <a:lnSpc>
+                <a:spcPct val="115000"/>
+              </a:lnSpc>
+              <a:spcBef>
+                <a:spcPts val="0"/>
+              </a:spcBef>
+              <a:spcAft>
+                <a:spcPts val="0"/>
+              </a:spcAft>
+            </a:pPr>
+            <a:r>
+              <a:rPr sz="2800" b="1">
+                <a:solidFill>
+                  <a:srgbClr val="C45C26"/>
+                </a:solidFill>
+                <a:latin typeface="Calibri"/>
+              </a:rPr>
+              <a:t>Operating model: </a:t>
+            </a:r>
+            <a:r>
+              <a:rPr sz="2800" b="1">
+                <a:solidFill>
+                  <a:srgbClr val="0A1F2E"/>
+                </a:solidFill>
+                <a:latin typeface="Calibri"/>
+              </a:rPr>
+              <a:t>FairBanks Community Reach</a:t>
+            </a:r>
+          </a:p>
+        </p:txBody>
+      </p:sp>
+      <p:sp>
+        <p:nvSpPr>
+          <p:cNvPr id="8" name="TextBox 7"/>
+          <p:cNvSpPr txBox="1"/>
+          <p:nvPr/>
+        </p:nvSpPr>
+        <p:spPr>
+          <a:xfrm>
+            <a:off x="502920" y="914400"/>
+            <a:ext cx="11185855" cy="384048"/>
           </a:xfrm>
           <a:prstGeom prst="rect">
             <a:avLst/>
@@ -6921,96 +6903,6 @@
               </a:spcAft>
             </a:pPr>
             <a:r>
-              <a:rPr sz="1700" b="1">
-                <a:solidFill>
-                  <a:srgbClr val="C45C26"/>
-                </a:solidFill>
-                <a:latin typeface="Calibri"/>
-              </a:rPr>
-              <a:t>OPERATING MODEL</a:t>
-            </a:r>
-          </a:p>
-        </p:txBody>
-      </p:sp>
-      <p:sp>
-        <p:nvSpPr>
-          <p:cNvPr id="8" name="TextBox 7"/>
-          <p:cNvSpPr txBox="1"/>
-          <p:nvPr/>
-        </p:nvSpPr>
-        <p:spPr>
-          <a:xfrm>
-            <a:off x="502920" y="402336"/>
-            <a:ext cx="9845942" cy="530352"/>
-          </a:xfrm>
-          <a:prstGeom prst="rect">
-            <a:avLst/>
-          </a:prstGeom>
-          <a:noFill/>
-        </p:spPr>
-        <p:txBody>
-          <a:bodyPr wrap="square" lIns="22000" rIns="22000" tIns="8000" bIns="8000" anchor="t">
-            <a:spAutoFit/>
-          </a:bodyPr>
-          <a:lstStyle/>
-          <a:p>
-            <a:pPr algn="l">
-              <a:lnSpc>
-                <a:spcPct val="150000"/>
-              </a:lnSpc>
-              <a:spcBef>
-                <a:spcPts val="0"/>
-              </a:spcBef>
-              <a:spcAft>
-                <a:spcPts val="0"/>
-              </a:spcAft>
-            </a:pPr>
-            <a:r>
-              <a:rPr sz="3200" b="1">
-                <a:solidFill>
-                  <a:srgbClr val="0A1F2E"/>
-                </a:solidFill>
-                <a:latin typeface="Calibri"/>
-              </a:rPr>
-              <a:t>FairBanks Community Reach</a:t>
-            </a:r>
-          </a:p>
-        </p:txBody>
-      </p:sp>
-      <p:sp>
-        <p:nvSpPr>
-          <p:cNvPr id="9" name="TextBox 8"/>
-          <p:cNvSpPr txBox="1"/>
-          <p:nvPr/>
-        </p:nvSpPr>
-        <p:spPr>
-          <a:xfrm>
-            <a:off x="502920" y="1005840"/>
-            <a:ext cx="11185855" cy="384048"/>
-          </a:xfrm>
-          <a:prstGeom prst="rect">
-            <a:avLst/>
-          </a:prstGeom>
-          <a:noFill/>
-        </p:spPr>
-        <p:txBody>
-          <a:bodyPr wrap="square" lIns="22000" rIns="22000" tIns="8000" bIns="8000" anchor="t">
-            <a:spAutoFit/>
-          </a:bodyPr>
-          <a:lstStyle/>
-          <a:p>
-            <a:pPr algn="l">
-              <a:lnSpc>
-                <a:spcPct val="150000"/>
-              </a:lnSpc>
-              <a:spcBef>
-                <a:spcPts val="0"/>
-              </a:spcBef>
-              <a:spcAft>
-                <a:spcPts val="0"/>
-              </a:spcAft>
-            </a:pPr>
-            <a:r>
               <a:rPr sz="2000" b="0">
                 <a:solidFill>
                   <a:srgbClr val="52636C"/>
@@ -7024,14 +6916,14 @@
       </p:sp>
       <p:sp>
         <p:nvSpPr>
-          <p:cNvPr id="10" name="Rounded Rectangle 9"/>
+          <p:cNvPr id="9" name="Rounded Rectangle 8"/>
           <p:cNvSpPr/>
           <p:nvPr/>
         </p:nvSpPr>
         <p:spPr>
           <a:xfrm>
-            <a:off x="502920" y="1444752"/>
-            <a:ext cx="5483199" cy="1426463"/>
+            <a:off x="502920" y="1298448"/>
+            <a:ext cx="5483199" cy="1475232"/>
           </a:xfrm>
           <a:prstGeom prst="roundRect">
             <a:avLst>
@@ -7072,14 +6964,14 @@
       </p:sp>
       <p:sp>
         <p:nvSpPr>
-          <p:cNvPr id="11" name="Rectangle 10"/>
+          <p:cNvPr id="10" name="Rectangle 9"/>
           <p:cNvSpPr/>
           <p:nvPr/>
         </p:nvSpPr>
         <p:spPr>
           <a:xfrm>
-            <a:off x="502920" y="1444752"/>
-            <a:ext cx="777240" cy="1426463"/>
+            <a:off x="502920" y="1298448"/>
+            <a:ext cx="777240" cy="1475232"/>
           </a:xfrm>
           <a:prstGeom prst="rect">
             <a:avLst/>
@@ -7116,14 +7008,14 @@
       </p:sp>
       <p:sp>
         <p:nvSpPr>
-          <p:cNvPr id="12" name="TextBox 11"/>
+          <p:cNvPr id="11" name="TextBox 10"/>
           <p:cNvSpPr txBox="1"/>
           <p:nvPr/>
         </p:nvSpPr>
         <p:spPr>
           <a:xfrm>
-            <a:off x="502920" y="1444752"/>
-            <a:ext cx="777240" cy="1426463"/>
+            <a:off x="502920" y="1298448"/>
+            <a:ext cx="777240" cy="1475232"/>
           </a:xfrm>
           <a:prstGeom prst="rect">
             <a:avLst/>
@@ -7161,13 +7053,13 @@
       </p:sp>
       <p:sp>
         <p:nvSpPr>
-          <p:cNvPr id="13" name="TextBox 12"/>
+          <p:cNvPr id="12" name="TextBox 11"/>
           <p:cNvSpPr txBox="1"/>
           <p:nvPr/>
         </p:nvSpPr>
         <p:spPr>
           <a:xfrm>
-            <a:off x="1463040" y="1682496"/>
+            <a:off x="1463040" y="1536192"/>
             <a:ext cx="4340199" cy="438912"/>
           </a:xfrm>
           <a:prstGeom prst="rect">
@@ -7206,14 +7098,14 @@
       </p:sp>
       <p:sp>
         <p:nvSpPr>
-          <p:cNvPr id="14" name="TextBox 13"/>
+          <p:cNvPr id="13" name="TextBox 12"/>
           <p:cNvSpPr txBox="1"/>
           <p:nvPr/>
         </p:nvSpPr>
         <p:spPr>
           <a:xfrm>
-            <a:off x="1463040" y="2176272"/>
-            <a:ext cx="4340199" cy="512063"/>
+            <a:off x="1463040" y="2029967"/>
+            <a:ext cx="4340199" cy="560832"/>
           </a:xfrm>
           <a:prstGeom prst="rect">
             <a:avLst/>
@@ -7251,14 +7143,14 @@
       </p:sp>
       <p:sp>
         <p:nvSpPr>
-          <p:cNvPr id="15" name="Rounded Rectangle 14"/>
+          <p:cNvPr id="14" name="Rounded Rectangle 13"/>
           <p:cNvSpPr/>
           <p:nvPr/>
         </p:nvSpPr>
         <p:spPr>
           <a:xfrm>
-            <a:off x="6205575" y="1444752"/>
-            <a:ext cx="5483199" cy="1426463"/>
+            <a:off x="6205575" y="1298448"/>
+            <a:ext cx="5483199" cy="1475232"/>
           </a:xfrm>
           <a:prstGeom prst="roundRect">
             <a:avLst>
@@ -7299,14 +7191,14 @@
       </p:sp>
       <p:sp>
         <p:nvSpPr>
-          <p:cNvPr id="16" name="Rectangle 15"/>
+          <p:cNvPr id="15" name="Rectangle 14"/>
           <p:cNvSpPr/>
           <p:nvPr/>
         </p:nvSpPr>
         <p:spPr>
           <a:xfrm>
-            <a:off x="6205575" y="1444752"/>
-            <a:ext cx="777240" cy="1426463"/>
+            <a:off x="6205575" y="1298448"/>
+            <a:ext cx="777240" cy="1475232"/>
           </a:xfrm>
           <a:prstGeom prst="rect">
             <a:avLst/>
@@ -7343,14 +7235,14 @@
       </p:sp>
       <p:sp>
         <p:nvSpPr>
-          <p:cNvPr id="17" name="TextBox 16"/>
+          <p:cNvPr id="16" name="TextBox 15"/>
           <p:cNvSpPr txBox="1"/>
           <p:nvPr/>
         </p:nvSpPr>
         <p:spPr>
           <a:xfrm>
-            <a:off x="6205575" y="1444752"/>
-            <a:ext cx="777240" cy="1426463"/>
+            <a:off x="6205575" y="1298448"/>
+            <a:ext cx="777240" cy="1475232"/>
           </a:xfrm>
           <a:prstGeom prst="rect">
             <a:avLst/>
@@ -7388,13 +7280,13 @@
       </p:sp>
       <p:sp>
         <p:nvSpPr>
-          <p:cNvPr id="18" name="TextBox 17"/>
+          <p:cNvPr id="17" name="TextBox 16"/>
           <p:cNvSpPr txBox="1"/>
           <p:nvPr/>
         </p:nvSpPr>
         <p:spPr>
           <a:xfrm>
-            <a:off x="7165695" y="1682496"/>
+            <a:off x="7165695" y="1536192"/>
             <a:ext cx="4340199" cy="438912"/>
           </a:xfrm>
           <a:prstGeom prst="rect">
@@ -7433,14 +7325,14 @@
       </p:sp>
       <p:sp>
         <p:nvSpPr>
-          <p:cNvPr id="19" name="TextBox 18"/>
+          <p:cNvPr id="18" name="TextBox 17"/>
           <p:cNvSpPr txBox="1"/>
           <p:nvPr/>
         </p:nvSpPr>
         <p:spPr>
           <a:xfrm>
-            <a:off x="7165695" y="2176272"/>
-            <a:ext cx="4340199" cy="512063"/>
+            <a:off x="7165695" y="2029967"/>
+            <a:ext cx="4340199" cy="560832"/>
           </a:xfrm>
           <a:prstGeom prst="rect">
             <a:avLst/>
@@ -7478,14 +7370,14 @@
       </p:sp>
       <p:sp>
         <p:nvSpPr>
-          <p:cNvPr id="20" name="Rounded Rectangle 19"/>
+          <p:cNvPr id="19" name="Rounded Rectangle 18"/>
           <p:cNvSpPr/>
           <p:nvPr/>
         </p:nvSpPr>
         <p:spPr>
           <a:xfrm>
-            <a:off x="502920" y="3035808"/>
-            <a:ext cx="5483199" cy="1426463"/>
+            <a:off x="502920" y="2938271"/>
+            <a:ext cx="5483199" cy="1475232"/>
           </a:xfrm>
           <a:prstGeom prst="roundRect">
             <a:avLst>
@@ -7526,14 +7418,14 @@
       </p:sp>
       <p:sp>
         <p:nvSpPr>
-          <p:cNvPr id="21" name="Rectangle 20"/>
+          <p:cNvPr id="20" name="Rectangle 19"/>
           <p:cNvSpPr/>
           <p:nvPr/>
         </p:nvSpPr>
         <p:spPr>
           <a:xfrm>
-            <a:off x="502920" y="3035808"/>
-            <a:ext cx="777240" cy="1426463"/>
+            <a:off x="502920" y="2938271"/>
+            <a:ext cx="777240" cy="1475232"/>
           </a:xfrm>
           <a:prstGeom prst="rect">
             <a:avLst/>
@@ -7570,14 +7462,14 @@
       </p:sp>
       <p:sp>
         <p:nvSpPr>
-          <p:cNvPr id="22" name="TextBox 21"/>
+          <p:cNvPr id="21" name="TextBox 20"/>
           <p:cNvSpPr txBox="1"/>
           <p:nvPr/>
         </p:nvSpPr>
         <p:spPr>
           <a:xfrm>
-            <a:off x="502920" y="3035808"/>
-            <a:ext cx="777240" cy="1426463"/>
+            <a:off x="502920" y="2938271"/>
+            <a:ext cx="777240" cy="1475232"/>
           </a:xfrm>
           <a:prstGeom prst="rect">
             <a:avLst/>
@@ -7615,13 +7507,13 @@
       </p:sp>
       <p:sp>
         <p:nvSpPr>
-          <p:cNvPr id="23" name="TextBox 22"/>
+          <p:cNvPr id="22" name="TextBox 21"/>
           <p:cNvSpPr txBox="1"/>
           <p:nvPr/>
         </p:nvSpPr>
         <p:spPr>
           <a:xfrm>
-            <a:off x="1463040" y="3273552"/>
+            <a:off x="1463040" y="3176015"/>
             <a:ext cx="4340199" cy="438912"/>
           </a:xfrm>
           <a:prstGeom prst="rect">
@@ -7660,14 +7552,14 @@
       </p:sp>
       <p:sp>
         <p:nvSpPr>
-          <p:cNvPr id="24" name="TextBox 23"/>
+          <p:cNvPr id="23" name="TextBox 22"/>
           <p:cNvSpPr txBox="1"/>
           <p:nvPr/>
         </p:nvSpPr>
         <p:spPr>
           <a:xfrm>
-            <a:off x="1463040" y="3767328"/>
-            <a:ext cx="4340199" cy="512063"/>
+            <a:off x="1463040" y="3669791"/>
+            <a:ext cx="4340199" cy="560832"/>
           </a:xfrm>
           <a:prstGeom prst="rect">
             <a:avLst/>
@@ -7705,14 +7597,14 @@
       </p:sp>
       <p:sp>
         <p:nvSpPr>
-          <p:cNvPr id="25" name="Rounded Rectangle 24"/>
+          <p:cNvPr id="24" name="Rounded Rectangle 23"/>
           <p:cNvSpPr/>
           <p:nvPr/>
         </p:nvSpPr>
         <p:spPr>
           <a:xfrm>
-            <a:off x="6205575" y="3035808"/>
-            <a:ext cx="5483199" cy="1426463"/>
+            <a:off x="6205575" y="2938271"/>
+            <a:ext cx="5483199" cy="1475232"/>
           </a:xfrm>
           <a:prstGeom prst="roundRect">
             <a:avLst>
@@ -7753,14 +7645,14 @@
       </p:sp>
       <p:sp>
         <p:nvSpPr>
-          <p:cNvPr id="26" name="Rectangle 25"/>
+          <p:cNvPr id="25" name="Rectangle 24"/>
           <p:cNvSpPr/>
           <p:nvPr/>
         </p:nvSpPr>
         <p:spPr>
           <a:xfrm>
-            <a:off x="6205575" y="3035808"/>
-            <a:ext cx="777240" cy="1426463"/>
+            <a:off x="6205575" y="2938271"/>
+            <a:ext cx="777240" cy="1475232"/>
           </a:xfrm>
           <a:prstGeom prst="rect">
             <a:avLst/>
@@ -7797,14 +7689,14 @@
       </p:sp>
       <p:sp>
         <p:nvSpPr>
-          <p:cNvPr id="27" name="TextBox 26"/>
+          <p:cNvPr id="26" name="TextBox 25"/>
           <p:cNvSpPr txBox="1"/>
           <p:nvPr/>
         </p:nvSpPr>
         <p:spPr>
           <a:xfrm>
-            <a:off x="6205575" y="3035808"/>
-            <a:ext cx="777240" cy="1426463"/>
+            <a:off x="6205575" y="2938271"/>
+            <a:ext cx="777240" cy="1475232"/>
           </a:xfrm>
           <a:prstGeom prst="rect">
             <a:avLst/>
@@ -7842,13 +7734,13 @@
       </p:sp>
       <p:sp>
         <p:nvSpPr>
-          <p:cNvPr id="28" name="TextBox 27"/>
+          <p:cNvPr id="27" name="TextBox 26"/>
           <p:cNvSpPr txBox="1"/>
           <p:nvPr/>
         </p:nvSpPr>
         <p:spPr>
           <a:xfrm>
-            <a:off x="7165695" y="3273552"/>
+            <a:off x="7165695" y="3176015"/>
             <a:ext cx="4340199" cy="438912"/>
           </a:xfrm>
           <a:prstGeom prst="rect">
@@ -7887,14 +7779,14 @@
       </p:sp>
       <p:sp>
         <p:nvSpPr>
-          <p:cNvPr id="29" name="TextBox 28"/>
+          <p:cNvPr id="28" name="TextBox 27"/>
           <p:cNvSpPr txBox="1"/>
           <p:nvPr/>
         </p:nvSpPr>
         <p:spPr>
           <a:xfrm>
-            <a:off x="7165695" y="3767328"/>
-            <a:ext cx="4340199" cy="512063"/>
+            <a:off x="7165695" y="3669791"/>
+            <a:ext cx="4340199" cy="560832"/>
           </a:xfrm>
           <a:prstGeom prst="rect">
             <a:avLst/>
@@ -7932,14 +7824,14 @@
       </p:sp>
       <p:sp>
         <p:nvSpPr>
-          <p:cNvPr id="30" name="Rounded Rectangle 29"/>
+          <p:cNvPr id="29" name="Rounded Rectangle 28"/>
           <p:cNvSpPr/>
           <p:nvPr/>
         </p:nvSpPr>
         <p:spPr>
           <a:xfrm>
-            <a:off x="502920" y="4626864"/>
-            <a:ext cx="5483199" cy="1426463"/>
+            <a:off x="502920" y="4578095"/>
+            <a:ext cx="5483199" cy="1475232"/>
           </a:xfrm>
           <a:prstGeom prst="roundRect">
             <a:avLst>
@@ -7980,14 +7872,14 @@
       </p:sp>
       <p:sp>
         <p:nvSpPr>
-          <p:cNvPr id="31" name="Rectangle 30"/>
+          <p:cNvPr id="30" name="Rectangle 29"/>
           <p:cNvSpPr/>
           <p:nvPr/>
         </p:nvSpPr>
         <p:spPr>
           <a:xfrm>
-            <a:off x="502920" y="4626864"/>
-            <a:ext cx="777240" cy="1426463"/>
+            <a:off x="502920" y="4578095"/>
+            <a:ext cx="777240" cy="1475232"/>
           </a:xfrm>
           <a:prstGeom prst="rect">
             <a:avLst/>
@@ -8024,14 +7916,14 @@
       </p:sp>
       <p:sp>
         <p:nvSpPr>
-          <p:cNvPr id="32" name="TextBox 31"/>
+          <p:cNvPr id="31" name="TextBox 30"/>
           <p:cNvSpPr txBox="1"/>
           <p:nvPr/>
         </p:nvSpPr>
         <p:spPr>
           <a:xfrm>
-            <a:off x="502920" y="4626864"/>
-            <a:ext cx="777240" cy="1426463"/>
+            <a:off x="502920" y="4578095"/>
+            <a:ext cx="777240" cy="1475232"/>
           </a:xfrm>
           <a:prstGeom prst="rect">
             <a:avLst/>
@@ -8069,13 +7961,13 @@
       </p:sp>
       <p:sp>
         <p:nvSpPr>
-          <p:cNvPr id="33" name="TextBox 32"/>
+          <p:cNvPr id="32" name="TextBox 31"/>
           <p:cNvSpPr txBox="1"/>
           <p:nvPr/>
         </p:nvSpPr>
         <p:spPr>
           <a:xfrm>
-            <a:off x="1463040" y="4864607"/>
+            <a:off x="1463040" y="4815839"/>
             <a:ext cx="4340199" cy="438912"/>
           </a:xfrm>
           <a:prstGeom prst="rect">
@@ -8114,14 +8006,14 @@
       </p:sp>
       <p:sp>
         <p:nvSpPr>
-          <p:cNvPr id="34" name="TextBox 33"/>
+          <p:cNvPr id="33" name="TextBox 32"/>
           <p:cNvSpPr txBox="1"/>
           <p:nvPr/>
         </p:nvSpPr>
         <p:spPr>
           <a:xfrm>
-            <a:off x="1463040" y="5358383"/>
-            <a:ext cx="4340199" cy="512063"/>
+            <a:off x="1463040" y="5309615"/>
+            <a:ext cx="4340199" cy="560832"/>
           </a:xfrm>
           <a:prstGeom prst="rect">
             <a:avLst/>
@@ -8159,14 +8051,14 @@
       </p:sp>
       <p:sp>
         <p:nvSpPr>
-          <p:cNvPr id="35" name="Rounded Rectangle 34"/>
+          <p:cNvPr id="34" name="Rounded Rectangle 33"/>
           <p:cNvSpPr/>
           <p:nvPr/>
         </p:nvSpPr>
         <p:spPr>
           <a:xfrm>
-            <a:off x="6205575" y="4626864"/>
-            <a:ext cx="5483199" cy="1426463"/>
+            <a:off x="6205575" y="4578095"/>
+            <a:ext cx="5483199" cy="1475232"/>
           </a:xfrm>
           <a:prstGeom prst="roundRect">
             <a:avLst>
@@ -8207,14 +8099,14 @@
       </p:sp>
       <p:sp>
         <p:nvSpPr>
-          <p:cNvPr id="36" name="Rectangle 35"/>
+          <p:cNvPr id="35" name="Rectangle 34"/>
           <p:cNvSpPr/>
           <p:nvPr/>
         </p:nvSpPr>
         <p:spPr>
           <a:xfrm>
-            <a:off x="6205575" y="4626864"/>
-            <a:ext cx="777240" cy="1426463"/>
+            <a:off x="6205575" y="4578095"/>
+            <a:ext cx="777240" cy="1475232"/>
           </a:xfrm>
           <a:prstGeom prst="rect">
             <a:avLst/>
@@ -8251,14 +8143,14 @@
       </p:sp>
       <p:sp>
         <p:nvSpPr>
-          <p:cNvPr id="37" name="TextBox 36"/>
+          <p:cNvPr id="36" name="TextBox 35"/>
           <p:cNvSpPr txBox="1"/>
           <p:nvPr/>
         </p:nvSpPr>
         <p:spPr>
           <a:xfrm>
-            <a:off x="6205575" y="4626864"/>
-            <a:ext cx="777240" cy="1426463"/>
+            <a:off x="6205575" y="4578095"/>
+            <a:ext cx="777240" cy="1475232"/>
           </a:xfrm>
           <a:prstGeom prst="rect">
             <a:avLst/>
@@ -8296,13 +8188,13 @@
       </p:sp>
       <p:sp>
         <p:nvSpPr>
-          <p:cNvPr id="38" name="TextBox 37"/>
+          <p:cNvPr id="37" name="TextBox 36"/>
           <p:cNvSpPr txBox="1"/>
           <p:nvPr/>
         </p:nvSpPr>
         <p:spPr>
           <a:xfrm>
-            <a:off x="7165695" y="4864607"/>
+            <a:off x="7165695" y="4815839"/>
             <a:ext cx="4340199" cy="438912"/>
           </a:xfrm>
           <a:prstGeom prst="rect">
@@ -8341,14 +8233,14 @@
       </p:sp>
       <p:sp>
         <p:nvSpPr>
-          <p:cNvPr id="39" name="TextBox 38"/>
+          <p:cNvPr id="38" name="TextBox 37"/>
           <p:cNvSpPr txBox="1"/>
           <p:nvPr/>
         </p:nvSpPr>
         <p:spPr>
           <a:xfrm>
-            <a:off x="7165695" y="5358383"/>
-            <a:ext cx="4340199" cy="512063"/>
+            <a:off x="7165695" y="5309615"/>
+            <a:ext cx="4340199" cy="560832"/>
           </a:xfrm>
           <a:prstGeom prst="rect">
             <a:avLst/>
@@ -8386,7 +8278,7 @@
       </p:sp>
       <p:sp>
         <p:nvSpPr>
-          <p:cNvPr id="40" name="Rectangle 39"/>
+          <p:cNvPr id="39" name="Rectangle 38"/>
           <p:cNvSpPr/>
           <p:nvPr/>
         </p:nvSpPr>
@@ -8430,7 +8322,7 @@
       </p:sp>
       <p:sp>
         <p:nvSpPr>
-          <p:cNvPr id="41" name="TextBox 40"/>
+          <p:cNvPr id="40" name="TextBox 39"/>
           <p:cNvSpPr txBox="1"/>
           <p:nvPr/>
         </p:nvSpPr>
@@ -8475,7 +8367,7 @@
       </p:sp>
       <p:sp>
         <p:nvSpPr>
-          <p:cNvPr id="42" name="TextBox 41"/>
+          <p:cNvPr id="41" name="TextBox 40"/>
           <p:cNvSpPr txBox="1"/>
           <p:nvPr/>
         </p:nvSpPr>
@@ -8796,8 +8688,8 @@
         </p:nvSpPr>
         <p:spPr>
           <a:xfrm>
-            <a:off x="502920" y="1097280"/>
-            <a:ext cx="5369210" cy="4956048"/>
+            <a:off x="502920" y="960120"/>
+            <a:ext cx="5369210" cy="5093208"/>
           </a:xfrm>
           <a:prstGeom prst="roundRect">
             <a:avLst>
@@ -8842,7 +8734,7 @@
         </p:nvSpPr>
         <p:spPr>
           <a:xfrm>
-            <a:off x="822960" y="1353312"/>
+            <a:off x="822960" y="1216152"/>
             <a:ext cx="4729130" cy="347472"/>
           </a:xfrm>
           <a:prstGeom prst="rect">
@@ -8887,7 +8779,7 @@
         </p:nvSpPr>
         <p:spPr>
           <a:xfrm>
-            <a:off x="822960" y="1755648"/>
+            <a:off x="822960" y="1618488"/>
             <a:ext cx="4729130" cy="822960"/>
           </a:xfrm>
           <a:prstGeom prst="rect">
@@ -8932,7 +8824,7 @@
         </p:nvSpPr>
         <p:spPr>
           <a:xfrm>
-            <a:off x="822960" y="2743200"/>
+            <a:off x="822960" y="2606040"/>
             <a:ext cx="4729130" cy="2194560"/>
           </a:xfrm>
           <a:prstGeom prst="rect">
@@ -9023,15 +8915,15 @@
         </p:nvPicPr>
         <p:blipFill>
           <a:blip r:embed="rId3"/>
-          <a:srcRect t="13475" b="13475"/>
+          <a:srcRect t="12464" b="12464"/>
           <a:stretch>
             <a:fillRect/>
           </a:stretch>
         </p:blipFill>
         <p:spPr>
           <a:xfrm>
-            <a:off x="6091586" y="1097280"/>
-            <a:ext cx="5597188" cy="2725826"/>
+            <a:off x="6091586" y="960120"/>
+            <a:ext cx="5597188" cy="2801264"/>
           </a:xfrm>
           <a:prstGeom prst="rect">
             <a:avLst/>
@@ -9046,8 +8938,8 @@
         </p:nvSpPr>
         <p:spPr>
           <a:xfrm>
-            <a:off x="6091586" y="3969410"/>
-            <a:ext cx="2734586" cy="621487"/>
+            <a:off x="6091586" y="3907688"/>
+            <a:ext cx="2734586" cy="642061"/>
           </a:xfrm>
           <a:prstGeom prst="roundRect">
             <a:avLst>
@@ -9094,8 +8986,8 @@
         </p:nvSpPr>
         <p:spPr>
           <a:xfrm>
-            <a:off x="6201314" y="4042562"/>
-            <a:ext cx="2515130" cy="475183"/>
+            <a:off x="6201314" y="3980840"/>
+            <a:ext cx="2515130" cy="495757"/>
           </a:xfrm>
           <a:prstGeom prst="rect">
             <a:avLst/>
@@ -9139,8 +9031,8 @@
         </p:nvSpPr>
         <p:spPr>
           <a:xfrm>
-            <a:off x="8954188" y="3969410"/>
-            <a:ext cx="2734586" cy="621487"/>
+            <a:off x="8954188" y="3907688"/>
+            <a:ext cx="2734586" cy="642061"/>
           </a:xfrm>
           <a:prstGeom prst="roundRect">
             <a:avLst>
@@ -9187,8 +9079,8 @@
         </p:nvSpPr>
         <p:spPr>
           <a:xfrm>
-            <a:off x="9063916" y="4042562"/>
-            <a:ext cx="2515130" cy="475183"/>
+            <a:off x="9063916" y="3980840"/>
+            <a:ext cx="2515130" cy="495757"/>
           </a:xfrm>
           <a:prstGeom prst="rect">
             <a:avLst/>
@@ -9232,8 +9124,8 @@
         </p:nvSpPr>
         <p:spPr>
           <a:xfrm>
-            <a:off x="6091586" y="4700625"/>
-            <a:ext cx="2734586" cy="621487"/>
+            <a:off x="6091586" y="4659477"/>
+            <a:ext cx="2734586" cy="642061"/>
           </a:xfrm>
           <a:prstGeom prst="roundRect">
             <a:avLst>
@@ -9280,8 +9172,8 @@
         </p:nvSpPr>
         <p:spPr>
           <a:xfrm>
-            <a:off x="6201314" y="4773777"/>
-            <a:ext cx="2515130" cy="475183"/>
+            <a:off x="6201314" y="4732629"/>
+            <a:ext cx="2515130" cy="495757"/>
           </a:xfrm>
           <a:prstGeom prst="rect">
             <a:avLst/>
@@ -9325,8 +9217,8 @@
         </p:nvSpPr>
         <p:spPr>
           <a:xfrm>
-            <a:off x="8954188" y="4700625"/>
-            <a:ext cx="2734586" cy="621487"/>
+            <a:off x="8954188" y="4659477"/>
+            <a:ext cx="2734586" cy="642061"/>
           </a:xfrm>
           <a:prstGeom prst="roundRect">
             <a:avLst>
@@ -9373,8 +9265,8 @@
         </p:nvSpPr>
         <p:spPr>
           <a:xfrm>
-            <a:off x="9063916" y="4773777"/>
-            <a:ext cx="2515130" cy="475183"/>
+            <a:off x="9063916" y="4732629"/>
+            <a:ext cx="2515130" cy="495757"/>
           </a:xfrm>
           <a:prstGeom prst="rect">
             <a:avLst/>
@@ -9418,8 +9310,8 @@
         </p:nvSpPr>
         <p:spPr>
           <a:xfrm>
-            <a:off x="6091586" y="5431840"/>
-            <a:ext cx="2734586" cy="621487"/>
+            <a:off x="6091586" y="5411266"/>
+            <a:ext cx="2734586" cy="642061"/>
           </a:xfrm>
           <a:prstGeom prst="roundRect">
             <a:avLst>
@@ -9466,8 +9358,8 @@
         </p:nvSpPr>
         <p:spPr>
           <a:xfrm>
-            <a:off x="6201314" y="5504992"/>
-            <a:ext cx="2515130" cy="475183"/>
+            <a:off x="6201314" y="5484418"/>
+            <a:ext cx="2515130" cy="495757"/>
           </a:xfrm>
           <a:prstGeom prst="rect">
             <a:avLst/>
@@ -9511,8 +9403,8 @@
         </p:nvSpPr>
         <p:spPr>
           <a:xfrm>
-            <a:off x="8954188" y="5431840"/>
-            <a:ext cx="2734586" cy="621487"/>
+            <a:off x="8954188" y="5411266"/>
+            <a:ext cx="2734586" cy="642061"/>
           </a:xfrm>
           <a:prstGeom prst="roundRect">
             <a:avLst>
@@ -9559,8 +9451,8 @@
         </p:nvSpPr>
         <p:spPr>
           <a:xfrm>
-            <a:off x="9063916" y="5504992"/>
-            <a:ext cx="2515130" cy="475183"/>
+            <a:off x="9063916" y="5484418"/>
+            <a:ext cx="2515130" cy="495757"/>
           </a:xfrm>
           <a:prstGeom prst="rect">
             <a:avLst/>
@@ -9963,8 +9855,62 @@
         </p:nvSpPr>
         <p:spPr>
           <a:xfrm>
-            <a:off x="502920" y="146304"/>
-            <a:ext cx="9845942" cy="292608"/>
+            <a:off x="502920" y="256032"/>
+            <a:ext cx="9845942" cy="566928"/>
+          </a:xfrm>
+          <a:prstGeom prst="rect">
+            <a:avLst/>
+          </a:prstGeom>
+          <a:noFill/>
+        </p:spPr>
+        <p:txBody>
+          <a:bodyPr wrap="square" lIns="18000" rIns="18000" tIns="4000" bIns="4000" anchor="ctr">
+            <a:spAutoFit/>
+          </a:bodyPr>
+          <a:lstStyle/>
+          <a:p>
+            <a:pPr algn="l">
+              <a:lnSpc>
+                <a:spcPct val="115000"/>
+              </a:lnSpc>
+              <a:spcBef>
+                <a:spcPts val="0"/>
+              </a:spcBef>
+              <a:spcAft>
+                <a:spcPts val="0"/>
+              </a:spcAft>
+            </a:pPr>
+            <a:r>
+              <a:rPr sz="2800" b="1">
+                <a:solidFill>
+                  <a:srgbClr val="C45C26"/>
+                </a:solidFill>
+                <a:latin typeface="Calibri"/>
+              </a:rPr>
+              <a:t>Fit with MUST: </a:t>
+            </a:r>
+            <a:r>
+              <a:rPr sz="2800" b="1">
+                <a:solidFill>
+                  <a:srgbClr val="0A1F2E"/>
+                </a:solidFill>
+                <a:latin typeface="Calibri"/>
+              </a:rPr>
+              <a:t>Why MUST is a strong partner</a:t>
+            </a:r>
+          </a:p>
+        </p:txBody>
+      </p:sp>
+      <p:sp>
+        <p:nvSpPr>
+          <p:cNvPr id="8" name="TextBox 7"/>
+          <p:cNvSpPr txBox="1"/>
+          <p:nvPr/>
+        </p:nvSpPr>
+        <p:spPr>
+          <a:xfrm>
+            <a:off x="502920" y="914400"/>
+            <a:ext cx="11185855" cy="384048"/>
           </a:xfrm>
           <a:prstGeom prst="rect">
             <a:avLst/>
@@ -9989,96 +9935,6 @@
               </a:spcAft>
             </a:pPr>
             <a:r>
-              <a:rPr sz="1700" b="1">
-                <a:solidFill>
-                  <a:srgbClr val="C45C26"/>
-                </a:solidFill>
-                <a:latin typeface="Calibri"/>
-              </a:rPr>
-              <a:t>FIT WITH MUST</a:t>
-            </a:r>
-          </a:p>
-        </p:txBody>
-      </p:sp>
-      <p:sp>
-        <p:nvSpPr>
-          <p:cNvPr id="8" name="TextBox 7"/>
-          <p:cNvSpPr txBox="1"/>
-          <p:nvPr/>
-        </p:nvSpPr>
-        <p:spPr>
-          <a:xfrm>
-            <a:off x="502920" y="402336"/>
-            <a:ext cx="9845942" cy="530352"/>
-          </a:xfrm>
-          <a:prstGeom prst="rect">
-            <a:avLst/>
-          </a:prstGeom>
-          <a:noFill/>
-        </p:spPr>
-        <p:txBody>
-          <a:bodyPr wrap="square" lIns="22000" rIns="22000" tIns="8000" bIns="8000" anchor="t">
-            <a:spAutoFit/>
-          </a:bodyPr>
-          <a:lstStyle/>
-          <a:p>
-            <a:pPr algn="l">
-              <a:lnSpc>
-                <a:spcPct val="150000"/>
-              </a:lnSpc>
-              <a:spcBef>
-                <a:spcPts val="0"/>
-              </a:spcBef>
-              <a:spcAft>
-                <a:spcPts val="0"/>
-              </a:spcAft>
-            </a:pPr>
-            <a:r>
-              <a:rPr sz="3200" b="1">
-                <a:solidFill>
-                  <a:srgbClr val="0A1F2E"/>
-                </a:solidFill>
-                <a:latin typeface="Calibri"/>
-              </a:rPr>
-              <a:t>Why MUST is a strong partner</a:t>
-            </a:r>
-          </a:p>
-        </p:txBody>
-      </p:sp>
-      <p:sp>
-        <p:nvSpPr>
-          <p:cNvPr id="9" name="TextBox 8"/>
-          <p:cNvSpPr txBox="1"/>
-          <p:nvPr/>
-        </p:nvSpPr>
-        <p:spPr>
-          <a:xfrm>
-            <a:off x="502920" y="1005840"/>
-            <a:ext cx="11185855" cy="384048"/>
-          </a:xfrm>
-          <a:prstGeom prst="rect">
-            <a:avLst/>
-          </a:prstGeom>
-          <a:noFill/>
-        </p:spPr>
-        <p:txBody>
-          <a:bodyPr wrap="square" lIns="22000" rIns="22000" tIns="8000" bIns="8000" anchor="t">
-            <a:spAutoFit/>
-          </a:bodyPr>
-          <a:lstStyle/>
-          <a:p>
-            <a:pPr algn="l">
-              <a:lnSpc>
-                <a:spcPct val="150000"/>
-              </a:lnSpc>
-              <a:spcBef>
-                <a:spcPts val="0"/>
-              </a:spcBef>
-              <a:spcAft>
-                <a:spcPts val="0"/>
-              </a:spcAft>
-            </a:pPr>
-            <a:r>
               <a:rPr sz="2000" b="0">
                 <a:solidFill>
                   <a:srgbClr val="52636C"/>
@@ -10092,14 +9948,14 @@
       </p:sp>
       <p:sp>
         <p:nvSpPr>
-          <p:cNvPr id="10" name="Rounded Rectangle 9"/>
+          <p:cNvPr id="9" name="Rounded Rectangle 8"/>
           <p:cNvSpPr/>
           <p:nvPr/>
         </p:nvSpPr>
         <p:spPr>
           <a:xfrm>
-            <a:off x="502920" y="1444752"/>
-            <a:ext cx="5510631" cy="2221992"/>
+            <a:off x="502920" y="1298448"/>
+            <a:ext cx="5510631" cy="2295144"/>
           </a:xfrm>
           <a:prstGeom prst="roundRect">
             <a:avLst>
@@ -10140,14 +9996,14 @@
       </p:sp>
       <p:sp>
         <p:nvSpPr>
-          <p:cNvPr id="11" name="Rectangle 10"/>
+          <p:cNvPr id="10" name="Rectangle 9"/>
           <p:cNvSpPr/>
           <p:nvPr/>
         </p:nvSpPr>
         <p:spPr>
           <a:xfrm>
-            <a:off x="667512" y="1645920"/>
-            <a:ext cx="91440" cy="1819656"/>
+            <a:off x="667512" y="1499616"/>
+            <a:ext cx="91440" cy="1892808"/>
           </a:xfrm>
           <a:prstGeom prst="rect">
             <a:avLst/>
@@ -10184,13 +10040,13 @@
       </p:sp>
       <p:sp>
         <p:nvSpPr>
-          <p:cNvPr id="12" name="TextBox 11"/>
+          <p:cNvPr id="11" name="TextBox 10"/>
           <p:cNvSpPr txBox="1"/>
           <p:nvPr/>
         </p:nvSpPr>
         <p:spPr>
           <a:xfrm>
-            <a:off x="914400" y="1700784"/>
+            <a:off x="914400" y="1554480"/>
             <a:ext cx="4870551" cy="502920"/>
           </a:xfrm>
           <a:prstGeom prst="rect">
@@ -10229,14 +10085,14 @@
       </p:sp>
       <p:sp>
         <p:nvSpPr>
-          <p:cNvPr id="13" name="TextBox 12"/>
+          <p:cNvPr id="12" name="TextBox 11"/>
           <p:cNvSpPr txBox="1"/>
           <p:nvPr/>
         </p:nvSpPr>
         <p:spPr>
           <a:xfrm>
-            <a:off x="914400" y="2313432"/>
-            <a:ext cx="4870551" cy="1078992"/>
+            <a:off x="914400" y="2167128"/>
+            <a:ext cx="4870551" cy="1152144"/>
           </a:xfrm>
           <a:prstGeom prst="rect">
             <a:avLst/>
@@ -10274,14 +10130,14 @@
       </p:sp>
       <p:sp>
         <p:nvSpPr>
-          <p:cNvPr id="14" name="Rounded Rectangle 13"/>
+          <p:cNvPr id="13" name="Rounded Rectangle 12"/>
           <p:cNvSpPr/>
           <p:nvPr/>
         </p:nvSpPr>
         <p:spPr>
           <a:xfrm>
-            <a:off x="6178143" y="1444752"/>
-            <a:ext cx="5510631" cy="2221992"/>
+            <a:off x="6178143" y="1298448"/>
+            <a:ext cx="5510631" cy="2295144"/>
           </a:xfrm>
           <a:prstGeom prst="roundRect">
             <a:avLst>
@@ -10322,14 +10178,14 @@
       </p:sp>
       <p:sp>
         <p:nvSpPr>
-          <p:cNvPr id="15" name="Rectangle 14"/>
+          <p:cNvPr id="14" name="Rectangle 13"/>
           <p:cNvSpPr/>
           <p:nvPr/>
         </p:nvSpPr>
         <p:spPr>
           <a:xfrm>
-            <a:off x="6342735" y="1645920"/>
-            <a:ext cx="91440" cy="1819656"/>
+            <a:off x="6342735" y="1499616"/>
+            <a:ext cx="91440" cy="1892808"/>
           </a:xfrm>
           <a:prstGeom prst="rect">
             <a:avLst/>
@@ -10366,13 +10222,13 @@
       </p:sp>
       <p:sp>
         <p:nvSpPr>
-          <p:cNvPr id="16" name="TextBox 15"/>
+          <p:cNvPr id="15" name="TextBox 14"/>
           <p:cNvSpPr txBox="1"/>
           <p:nvPr/>
         </p:nvSpPr>
         <p:spPr>
           <a:xfrm>
-            <a:off x="6589623" y="1700784"/>
+            <a:off x="6589623" y="1554480"/>
             <a:ext cx="4870551" cy="502920"/>
           </a:xfrm>
           <a:prstGeom prst="rect">
@@ -10411,14 +10267,14 @@
       </p:sp>
       <p:sp>
         <p:nvSpPr>
-          <p:cNvPr id="17" name="TextBox 16"/>
+          <p:cNvPr id="16" name="TextBox 15"/>
           <p:cNvSpPr txBox="1"/>
           <p:nvPr/>
         </p:nvSpPr>
         <p:spPr>
           <a:xfrm>
-            <a:off x="6589623" y="2313432"/>
-            <a:ext cx="4870551" cy="1078992"/>
+            <a:off x="6589623" y="2167128"/>
+            <a:ext cx="4870551" cy="1152144"/>
           </a:xfrm>
           <a:prstGeom prst="rect">
             <a:avLst/>
@@ -10456,14 +10312,14 @@
       </p:sp>
       <p:sp>
         <p:nvSpPr>
-          <p:cNvPr id="18" name="Rounded Rectangle 17"/>
+          <p:cNvPr id="17" name="Rounded Rectangle 16"/>
           <p:cNvSpPr/>
           <p:nvPr/>
         </p:nvSpPr>
         <p:spPr>
           <a:xfrm>
-            <a:off x="502920" y="3831336"/>
-            <a:ext cx="5510631" cy="2221992"/>
+            <a:off x="502920" y="3758184"/>
+            <a:ext cx="5510631" cy="2295144"/>
           </a:xfrm>
           <a:prstGeom prst="roundRect">
             <a:avLst>
@@ -10504,14 +10360,14 @@
       </p:sp>
       <p:sp>
         <p:nvSpPr>
-          <p:cNvPr id="19" name="Rectangle 18"/>
+          <p:cNvPr id="18" name="Rectangle 17"/>
           <p:cNvSpPr/>
           <p:nvPr/>
         </p:nvSpPr>
         <p:spPr>
           <a:xfrm>
-            <a:off x="667512" y="4032504"/>
-            <a:ext cx="91440" cy="1819656"/>
+            <a:off x="667512" y="3959352"/>
+            <a:ext cx="91440" cy="1892808"/>
           </a:xfrm>
           <a:prstGeom prst="rect">
             <a:avLst/>
@@ -10548,13 +10404,13 @@
       </p:sp>
       <p:sp>
         <p:nvSpPr>
-          <p:cNvPr id="20" name="TextBox 19"/>
+          <p:cNvPr id="19" name="TextBox 18"/>
           <p:cNvSpPr txBox="1"/>
           <p:nvPr/>
         </p:nvSpPr>
         <p:spPr>
           <a:xfrm>
-            <a:off x="914400" y="4087368"/>
+            <a:off x="914400" y="4014216"/>
             <a:ext cx="4870551" cy="502920"/>
           </a:xfrm>
           <a:prstGeom prst="rect">
@@ -10593,14 +10449,14 @@
       </p:sp>
       <p:sp>
         <p:nvSpPr>
-          <p:cNvPr id="21" name="TextBox 20"/>
+          <p:cNvPr id="20" name="TextBox 19"/>
           <p:cNvSpPr txBox="1"/>
           <p:nvPr/>
         </p:nvSpPr>
         <p:spPr>
           <a:xfrm>
-            <a:off x="914400" y="4700016"/>
-            <a:ext cx="4870551" cy="1078992"/>
+            <a:off x="914400" y="4626864"/>
+            <a:ext cx="4870551" cy="1152144"/>
           </a:xfrm>
           <a:prstGeom prst="rect">
             <a:avLst/>
@@ -10638,14 +10494,14 @@
       </p:sp>
       <p:sp>
         <p:nvSpPr>
-          <p:cNvPr id="22" name="Rounded Rectangle 21"/>
+          <p:cNvPr id="21" name="Rounded Rectangle 20"/>
           <p:cNvSpPr/>
           <p:nvPr/>
         </p:nvSpPr>
         <p:spPr>
           <a:xfrm>
-            <a:off x="6178143" y="3831336"/>
-            <a:ext cx="5510631" cy="2221992"/>
+            <a:off x="6178143" y="3758184"/>
+            <a:ext cx="5510631" cy="2295144"/>
           </a:xfrm>
           <a:prstGeom prst="roundRect">
             <a:avLst>
@@ -10686,14 +10542,14 @@
       </p:sp>
       <p:sp>
         <p:nvSpPr>
-          <p:cNvPr id="23" name="Rectangle 22"/>
+          <p:cNvPr id="22" name="Rectangle 21"/>
           <p:cNvSpPr/>
           <p:nvPr/>
         </p:nvSpPr>
         <p:spPr>
           <a:xfrm>
-            <a:off x="6342735" y="4032504"/>
-            <a:ext cx="91440" cy="1819656"/>
+            <a:off x="6342735" y="3959352"/>
+            <a:ext cx="91440" cy="1892808"/>
           </a:xfrm>
           <a:prstGeom prst="rect">
             <a:avLst/>
@@ -10730,13 +10586,13 @@
       </p:sp>
       <p:sp>
         <p:nvSpPr>
-          <p:cNvPr id="24" name="TextBox 23"/>
+          <p:cNvPr id="23" name="TextBox 22"/>
           <p:cNvSpPr txBox="1"/>
           <p:nvPr/>
         </p:nvSpPr>
         <p:spPr>
           <a:xfrm>
-            <a:off x="6589623" y="4087368"/>
+            <a:off x="6589623" y="4014216"/>
             <a:ext cx="4870551" cy="502920"/>
           </a:xfrm>
           <a:prstGeom prst="rect">
@@ -10775,14 +10631,14 @@
       </p:sp>
       <p:sp>
         <p:nvSpPr>
-          <p:cNvPr id="25" name="TextBox 24"/>
+          <p:cNvPr id="24" name="TextBox 23"/>
           <p:cNvSpPr txBox="1"/>
           <p:nvPr/>
         </p:nvSpPr>
         <p:spPr>
           <a:xfrm>
-            <a:off x="6589623" y="4700016"/>
-            <a:ext cx="4870551" cy="1078992"/>
+            <a:off x="6589623" y="4626864"/>
+            <a:ext cx="4870551" cy="1152144"/>
           </a:xfrm>
           <a:prstGeom prst="rect">
             <a:avLst/>
@@ -10820,7 +10676,7 @@
       </p:sp>
       <p:sp>
         <p:nvSpPr>
-          <p:cNvPr id="26" name="Rectangle 25"/>
+          <p:cNvPr id="25" name="Rectangle 24"/>
           <p:cNvSpPr/>
           <p:nvPr/>
         </p:nvSpPr>
@@ -10864,7 +10720,7 @@
       </p:sp>
       <p:sp>
         <p:nvSpPr>
-          <p:cNvPr id="27" name="TextBox 26"/>
+          <p:cNvPr id="26" name="TextBox 25"/>
           <p:cNvSpPr txBox="1"/>
           <p:nvPr/>
         </p:nvSpPr>
@@ -10909,7 +10765,7 @@
       </p:sp>
       <p:sp>
         <p:nvSpPr>
-          <p:cNvPr id="28" name="TextBox 27"/>
+          <p:cNvPr id="27" name="TextBox 26"/>
           <p:cNvSpPr txBox="1"/>
           <p:nvPr/>
         </p:nvSpPr>
@@ -11230,8 +11086,8 @@
         </p:nvSpPr>
         <p:spPr>
           <a:xfrm>
-            <a:off x="502920" y="1170432"/>
-            <a:ext cx="11185855" cy="874166"/>
+            <a:off x="502920" y="1033272"/>
+            <a:ext cx="11185855" cy="901598"/>
           </a:xfrm>
           <a:prstGeom prst="roundRect">
             <a:avLst>
@@ -11278,7 +11134,7 @@
         </p:nvSpPr>
         <p:spPr>
           <a:xfrm>
-            <a:off x="704088" y="1324051"/>
+            <a:off x="704088" y="1200607"/>
             <a:ext cx="566928" cy="566928"/>
           </a:xfrm>
           <a:prstGeom prst="roundRect">
@@ -11324,7 +11180,7 @@
         </p:nvSpPr>
         <p:spPr>
           <a:xfrm>
-            <a:off x="704088" y="1324051"/>
+            <a:off x="704088" y="1200607"/>
             <a:ext cx="566928" cy="566928"/>
           </a:xfrm>
           <a:prstGeom prst="rect">
@@ -11369,7 +11225,7 @@
         </p:nvSpPr>
         <p:spPr>
           <a:xfrm>
-            <a:off x="1527048" y="1250899"/>
+            <a:off x="1527048" y="1127455"/>
             <a:ext cx="9905695" cy="347472"/>
           </a:xfrm>
           <a:prstGeom prst="rect">
@@ -11414,7 +11270,7 @@
         </p:nvSpPr>
         <p:spPr>
           <a:xfrm>
-            <a:off x="1527048" y="1598371"/>
+            <a:off x="1527048" y="1474927"/>
             <a:ext cx="9905695" cy="347472"/>
           </a:xfrm>
           <a:prstGeom prst="rect">
@@ -11459,8 +11315,8 @@
         </p:nvSpPr>
         <p:spPr>
           <a:xfrm>
-            <a:off x="502920" y="2172614"/>
-            <a:ext cx="11185855" cy="874166"/>
+            <a:off x="502920" y="2062886"/>
+            <a:ext cx="11185855" cy="901598"/>
           </a:xfrm>
           <a:prstGeom prst="roundRect">
             <a:avLst>
@@ -11507,7 +11363,7 @@
         </p:nvSpPr>
         <p:spPr>
           <a:xfrm>
-            <a:off x="704088" y="2326233"/>
+            <a:off x="704088" y="2230221"/>
             <a:ext cx="566928" cy="566928"/>
           </a:xfrm>
           <a:prstGeom prst="roundRect">
@@ -11553,7 +11409,7 @@
         </p:nvSpPr>
         <p:spPr>
           <a:xfrm>
-            <a:off x="704088" y="2326233"/>
+            <a:off x="704088" y="2230221"/>
             <a:ext cx="566928" cy="566928"/>
           </a:xfrm>
           <a:prstGeom prst="rect">
@@ -11598,7 +11454,7 @@
         </p:nvSpPr>
         <p:spPr>
           <a:xfrm>
-            <a:off x="1527048" y="2253081"/>
+            <a:off x="1527048" y="2157069"/>
             <a:ext cx="9905695" cy="347472"/>
           </a:xfrm>
           <a:prstGeom prst="rect">
@@ -11643,7 +11499,7 @@
         </p:nvSpPr>
         <p:spPr>
           <a:xfrm>
-            <a:off x="1527048" y="2600553"/>
+            <a:off x="1527048" y="2504541"/>
             <a:ext cx="9905695" cy="347472"/>
           </a:xfrm>
           <a:prstGeom prst="rect">
@@ -11688,8 +11544,8 @@
         </p:nvSpPr>
         <p:spPr>
           <a:xfrm>
-            <a:off x="502920" y="3174796"/>
-            <a:ext cx="11185855" cy="874166"/>
+            <a:off x="502920" y="3092500"/>
+            <a:ext cx="11185855" cy="901598"/>
           </a:xfrm>
           <a:prstGeom prst="roundRect">
             <a:avLst>
@@ -11736,7 +11592,7 @@
         </p:nvSpPr>
         <p:spPr>
           <a:xfrm>
-            <a:off x="704088" y="3328415"/>
+            <a:off x="704088" y="3259835"/>
             <a:ext cx="566928" cy="566928"/>
           </a:xfrm>
           <a:prstGeom prst="roundRect">
@@ -11782,7 +11638,7 @@
         </p:nvSpPr>
         <p:spPr>
           <a:xfrm>
-            <a:off x="704088" y="3328415"/>
+            <a:off x="704088" y="3259835"/>
             <a:ext cx="566928" cy="566928"/>
           </a:xfrm>
           <a:prstGeom prst="rect">
@@ -11827,7 +11683,7 @@
         </p:nvSpPr>
         <p:spPr>
           <a:xfrm>
-            <a:off x="1527048" y="3255263"/>
+            <a:off x="1527048" y="3186683"/>
             <a:ext cx="9905695" cy="347472"/>
           </a:xfrm>
           <a:prstGeom prst="rect">
@@ -11872,7 +11728,7 @@
         </p:nvSpPr>
         <p:spPr>
           <a:xfrm>
-            <a:off x="1527048" y="3602735"/>
+            <a:off x="1527048" y="3534155"/>
             <a:ext cx="9905695" cy="347472"/>
           </a:xfrm>
           <a:prstGeom prst="rect">
@@ -11917,8 +11773,8 @@
         </p:nvSpPr>
         <p:spPr>
           <a:xfrm>
-            <a:off x="502920" y="4176979"/>
-            <a:ext cx="11185855" cy="874166"/>
+            <a:off x="502920" y="4122115"/>
+            <a:ext cx="11185855" cy="901598"/>
           </a:xfrm>
           <a:prstGeom prst="roundRect">
             <a:avLst>
@@ -11965,7 +11821,7 @@
         </p:nvSpPr>
         <p:spPr>
           <a:xfrm>
-            <a:off x="704088" y="4330598"/>
+            <a:off x="704088" y="4289450"/>
             <a:ext cx="566928" cy="566928"/>
           </a:xfrm>
           <a:prstGeom prst="roundRect">
@@ -12011,7 +11867,7 @@
         </p:nvSpPr>
         <p:spPr>
           <a:xfrm>
-            <a:off x="704088" y="4330598"/>
+            <a:off x="704088" y="4289450"/>
             <a:ext cx="566928" cy="566928"/>
           </a:xfrm>
           <a:prstGeom prst="rect">
@@ -12056,7 +11912,7 @@
         </p:nvSpPr>
         <p:spPr>
           <a:xfrm>
-            <a:off x="1527048" y="4257446"/>
+            <a:off x="1527048" y="4216298"/>
             <a:ext cx="9905695" cy="347472"/>
           </a:xfrm>
           <a:prstGeom prst="rect">
@@ -12101,7 +11957,7 @@
         </p:nvSpPr>
         <p:spPr>
           <a:xfrm>
-            <a:off x="1527048" y="4604918"/>
+            <a:off x="1527048" y="4563770"/>
             <a:ext cx="9905695" cy="347472"/>
           </a:xfrm>
           <a:prstGeom prst="rect">
@@ -12146,8 +12002,8 @@
         </p:nvSpPr>
         <p:spPr>
           <a:xfrm>
-            <a:off x="502920" y="5179161"/>
-            <a:ext cx="11185855" cy="874166"/>
+            <a:off x="502920" y="5151729"/>
+            <a:ext cx="11185855" cy="901598"/>
           </a:xfrm>
           <a:prstGeom prst="roundRect">
             <a:avLst>
@@ -12194,7 +12050,7 @@
         </p:nvSpPr>
         <p:spPr>
           <a:xfrm>
-            <a:off x="704088" y="5332780"/>
+            <a:off x="704088" y="5319064"/>
             <a:ext cx="566928" cy="566928"/>
           </a:xfrm>
           <a:prstGeom prst="roundRect">
@@ -12240,7 +12096,7 @@
         </p:nvSpPr>
         <p:spPr>
           <a:xfrm>
-            <a:off x="704088" y="5332780"/>
+            <a:off x="704088" y="5319064"/>
             <a:ext cx="566928" cy="566928"/>
           </a:xfrm>
           <a:prstGeom prst="rect">
@@ -12285,7 +12141,7 @@
         </p:nvSpPr>
         <p:spPr>
           <a:xfrm>
-            <a:off x="1527048" y="5259628"/>
+            <a:off x="1527048" y="5245912"/>
             <a:ext cx="9905695" cy="347472"/>
           </a:xfrm>
           <a:prstGeom prst="rect">
@@ -12330,7 +12186,7 @@
         </p:nvSpPr>
         <p:spPr>
           <a:xfrm>
-            <a:off x="1527048" y="5607100"/>
+            <a:off x="1527048" y="5593384"/>
             <a:ext cx="9905695" cy="347472"/>
           </a:xfrm>
           <a:prstGeom prst="rect">
@@ -12734,8 +12590,62 @@
         </p:nvSpPr>
         <p:spPr>
           <a:xfrm>
-            <a:off x="502920" y="146304"/>
-            <a:ext cx="9845942" cy="292608"/>
+            <a:off x="502920" y="256032"/>
+            <a:ext cx="9845942" cy="566928"/>
+          </a:xfrm>
+          <a:prstGeom prst="rect">
+            <a:avLst/>
+          </a:prstGeom>
+          <a:noFill/>
+        </p:spPr>
+        <p:txBody>
+          <a:bodyPr wrap="square" lIns="18000" rIns="18000" tIns="4000" bIns="4000" anchor="ctr">
+            <a:spAutoFit/>
+          </a:bodyPr>
+          <a:lstStyle/>
+          <a:p>
+            <a:pPr algn="l">
+              <a:lnSpc>
+                <a:spcPct val="115000"/>
+              </a:lnSpc>
+              <a:spcBef>
+                <a:spcPts val="0"/>
+              </a:spcBef>
+              <a:spcAft>
+                <a:spcPts val="0"/>
+              </a:spcAft>
+            </a:pPr>
+            <a:r>
+              <a:rPr sz="2800" b="1">
+                <a:solidFill>
+                  <a:srgbClr val="C45C26"/>
+                </a:solidFill>
+                <a:latin typeface="Calibri"/>
+              </a:rPr>
+              <a:t>Funding &amp; science: </a:t>
+            </a:r>
+            <a:r>
+              <a:rPr sz="2800" b="1">
+                <a:solidFill>
+                  <a:srgbClr val="0A1F2E"/>
+                </a:solidFill>
+                <a:latin typeface="Calibri"/>
+              </a:rPr>
+              <a:t>Joint research and grants</a:t>
+            </a:r>
+          </a:p>
+        </p:txBody>
+      </p:sp>
+      <p:sp>
+        <p:nvSpPr>
+          <p:cNvPr id="8" name="TextBox 7"/>
+          <p:cNvSpPr txBox="1"/>
+          <p:nvPr/>
+        </p:nvSpPr>
+        <p:spPr>
+          <a:xfrm>
+            <a:off x="502920" y="914400"/>
+            <a:ext cx="11185855" cy="384048"/>
           </a:xfrm>
           <a:prstGeom prst="rect">
             <a:avLst/>
@@ -12760,96 +12670,6 @@
               </a:spcAft>
             </a:pPr>
             <a:r>
-              <a:rPr sz="1700" b="1">
-                <a:solidFill>
-                  <a:srgbClr val="C45C26"/>
-                </a:solidFill>
-                <a:latin typeface="Calibri"/>
-              </a:rPr>
-              <a:t>FUNDING &amp; SCIENCE</a:t>
-            </a:r>
-          </a:p>
-        </p:txBody>
-      </p:sp>
-      <p:sp>
-        <p:nvSpPr>
-          <p:cNvPr id="8" name="TextBox 7"/>
-          <p:cNvSpPr txBox="1"/>
-          <p:nvPr/>
-        </p:nvSpPr>
-        <p:spPr>
-          <a:xfrm>
-            <a:off x="502920" y="402336"/>
-            <a:ext cx="9845942" cy="530352"/>
-          </a:xfrm>
-          <a:prstGeom prst="rect">
-            <a:avLst/>
-          </a:prstGeom>
-          <a:noFill/>
-        </p:spPr>
-        <p:txBody>
-          <a:bodyPr wrap="square" lIns="22000" rIns="22000" tIns="8000" bIns="8000" anchor="t">
-            <a:spAutoFit/>
-          </a:bodyPr>
-          <a:lstStyle/>
-          <a:p>
-            <a:pPr algn="l">
-              <a:lnSpc>
-                <a:spcPct val="150000"/>
-              </a:lnSpc>
-              <a:spcBef>
-                <a:spcPts val="0"/>
-              </a:spcBef>
-              <a:spcAft>
-                <a:spcPts val="0"/>
-              </a:spcAft>
-            </a:pPr>
-            <a:r>
-              <a:rPr sz="3200" b="1">
-                <a:solidFill>
-                  <a:srgbClr val="0A1F2E"/>
-                </a:solidFill>
-                <a:latin typeface="Calibri"/>
-              </a:rPr>
-              <a:t>Joint research and grants</a:t>
-            </a:r>
-          </a:p>
-        </p:txBody>
-      </p:sp>
-      <p:sp>
-        <p:nvSpPr>
-          <p:cNvPr id="9" name="TextBox 8"/>
-          <p:cNvSpPr txBox="1"/>
-          <p:nvPr/>
-        </p:nvSpPr>
-        <p:spPr>
-          <a:xfrm>
-            <a:off x="502920" y="1005840"/>
-            <a:ext cx="11185855" cy="384048"/>
-          </a:xfrm>
-          <a:prstGeom prst="rect">
-            <a:avLst/>
-          </a:prstGeom>
-          <a:noFill/>
-        </p:spPr>
-        <p:txBody>
-          <a:bodyPr wrap="square" lIns="22000" rIns="22000" tIns="8000" bIns="8000" anchor="t">
-            <a:spAutoFit/>
-          </a:bodyPr>
-          <a:lstStyle/>
-          <a:p>
-            <a:pPr algn="l">
-              <a:lnSpc>
-                <a:spcPct val="150000"/>
-              </a:lnSpc>
-              <a:spcBef>
-                <a:spcPts val="0"/>
-              </a:spcBef>
-              <a:spcAft>
-                <a:spcPts val="0"/>
-              </a:spcAft>
-            </a:pPr>
-            <a:r>
               <a:rPr sz="2000" b="0">
                 <a:solidFill>
                   <a:srgbClr val="52636C"/>
@@ -12863,14 +12683,14 @@
       </p:sp>
       <p:sp>
         <p:nvSpPr>
-          <p:cNvPr id="10" name="Rounded Rectangle 9"/>
+          <p:cNvPr id="9" name="Rounded Rectangle 8"/>
           <p:cNvSpPr/>
           <p:nvPr/>
         </p:nvSpPr>
         <p:spPr>
           <a:xfrm>
-            <a:off x="502920" y="1444752"/>
-            <a:ext cx="5702527" cy="4608576"/>
+            <a:off x="502920" y="1298448"/>
+            <a:ext cx="5702527" cy="4754880"/>
           </a:xfrm>
           <a:prstGeom prst="roundRect">
             <a:avLst>
@@ -12911,13 +12731,13 @@
       </p:sp>
       <p:sp>
         <p:nvSpPr>
-          <p:cNvPr id="11" name="TextBox 10"/>
+          <p:cNvPr id="10" name="TextBox 9"/>
           <p:cNvSpPr txBox="1"/>
           <p:nvPr/>
         </p:nvSpPr>
         <p:spPr>
           <a:xfrm>
-            <a:off x="795528" y="1700784"/>
+            <a:off x="795528" y="1554480"/>
             <a:ext cx="5153887" cy="384048"/>
           </a:xfrm>
           <a:prstGeom prst="rect">
@@ -12956,14 +12776,14 @@
       </p:sp>
       <p:sp>
         <p:nvSpPr>
-          <p:cNvPr id="12" name="TextBox 11"/>
+          <p:cNvPr id="11" name="TextBox 10"/>
           <p:cNvSpPr txBox="1"/>
           <p:nvPr/>
         </p:nvSpPr>
         <p:spPr>
           <a:xfrm>
-            <a:off x="795528" y="2267712"/>
-            <a:ext cx="5153887" cy="3557016"/>
+            <a:off x="795528" y="2121408"/>
+            <a:ext cx="5153887" cy="3703320"/>
           </a:xfrm>
           <a:prstGeom prst="rect">
             <a:avLst/>
@@ -13089,14 +12909,14 @@
       </p:sp>
       <p:sp>
         <p:nvSpPr>
-          <p:cNvPr id="13" name="Rounded Rectangle 12"/>
+          <p:cNvPr id="12" name="Rounded Rectangle 11"/>
           <p:cNvSpPr/>
           <p:nvPr/>
         </p:nvSpPr>
         <p:spPr>
           <a:xfrm>
-            <a:off x="6424903" y="1444752"/>
-            <a:ext cx="5263871" cy="4608576"/>
+            <a:off x="6424903" y="1298448"/>
+            <a:ext cx="5263871" cy="4754880"/>
           </a:xfrm>
           <a:prstGeom prst="roundRect">
             <a:avLst>
@@ -13135,13 +12955,13 @@
       </p:sp>
       <p:sp>
         <p:nvSpPr>
-          <p:cNvPr id="14" name="TextBox 13"/>
+          <p:cNvPr id="13" name="TextBox 12"/>
           <p:cNvSpPr txBox="1"/>
           <p:nvPr/>
         </p:nvSpPr>
         <p:spPr>
           <a:xfrm>
-            <a:off x="6717511" y="1764792"/>
+            <a:off x="6717511" y="1618488"/>
             <a:ext cx="4678655" cy="384048"/>
           </a:xfrm>
           <a:prstGeom prst="rect">
@@ -13180,14 +13000,14 @@
       </p:sp>
       <p:sp>
         <p:nvSpPr>
-          <p:cNvPr id="15" name="TextBox 14"/>
+          <p:cNvPr id="14" name="TextBox 13"/>
           <p:cNvSpPr txBox="1"/>
           <p:nvPr/>
         </p:nvSpPr>
         <p:spPr>
           <a:xfrm>
-            <a:off x="6717511" y="2359152"/>
-            <a:ext cx="4678655" cy="3328416"/>
+            <a:off x="6717511" y="2212848"/>
+            <a:ext cx="4678655" cy="3474720"/>
           </a:xfrm>
           <a:prstGeom prst="rect">
             <a:avLst/>
@@ -13313,7 +13133,7 @@
       </p:sp>
       <p:sp>
         <p:nvSpPr>
-          <p:cNvPr id="16" name="Rectangle 15"/>
+          <p:cNvPr id="15" name="Rectangle 14"/>
           <p:cNvSpPr/>
           <p:nvPr/>
         </p:nvSpPr>
@@ -13357,7 +13177,7 @@
       </p:sp>
       <p:sp>
         <p:nvSpPr>
-          <p:cNvPr id="17" name="TextBox 16"/>
+          <p:cNvPr id="16" name="TextBox 15"/>
           <p:cNvSpPr txBox="1"/>
           <p:nvPr/>
         </p:nvSpPr>
@@ -13402,7 +13222,7 @@
       </p:sp>
       <p:sp>
         <p:nvSpPr>
-          <p:cNvPr id="18" name="TextBox 17"/>
+          <p:cNvPr id="17" name="TextBox 16"/>
           <p:cNvSpPr txBox="1"/>
           <p:nvPr/>
         </p:nvSpPr>
@@ -13678,8 +13498,8 @@
         </p:nvSpPr>
         <p:spPr>
           <a:xfrm>
-            <a:off x="502920" y="146304"/>
-            <a:ext cx="9845942" cy="292608"/>
+            <a:off x="502920" y="256032"/>
+            <a:ext cx="9845942" cy="566928"/>
           </a:xfrm>
           <a:prstGeom prst="rect">
             <a:avLst/>
@@ -13687,14 +13507,14 @@
           <a:noFill/>
         </p:spPr>
         <p:txBody>
-          <a:bodyPr wrap="square" lIns="22000" rIns="22000" tIns="8000" bIns="8000" anchor="t">
+          <a:bodyPr wrap="square" lIns="18000" rIns="18000" tIns="4000" bIns="4000" anchor="ctr">
             <a:spAutoFit/>
           </a:bodyPr>
           <a:lstStyle/>
           <a:p>
             <a:pPr algn="l">
               <a:lnSpc>
-                <a:spcPct val="150000"/>
+                <a:spcPct val="115000"/>
               </a:lnSpc>
               <a:spcBef>
                 <a:spcPts val="0"/>
@@ -13704,52 +13524,16 @@
               </a:spcAft>
             </a:pPr>
             <a:r>
-              <a:rPr sz="1700" b="1">
+              <a:rPr sz="2800" b="1">
                 <a:solidFill>
                   <a:srgbClr val="C45C26"/>
                 </a:solidFill>
                 <a:latin typeface="Calibri"/>
               </a:rPr>
-              <a:t>NEXT STEPS</a:t>
-            </a:r>
-          </a:p>
-        </p:txBody>
-      </p:sp>
-      <p:sp>
-        <p:nvSpPr>
-          <p:cNvPr id="8" name="TextBox 7"/>
-          <p:cNvSpPr txBox="1"/>
-          <p:nvPr/>
-        </p:nvSpPr>
-        <p:spPr>
-          <a:xfrm>
-            <a:off x="502920" y="402336"/>
-            <a:ext cx="9845942" cy="530352"/>
-          </a:xfrm>
-          <a:prstGeom prst="rect">
-            <a:avLst/>
-          </a:prstGeom>
-          <a:noFill/>
-        </p:spPr>
-        <p:txBody>
-          <a:bodyPr wrap="square" lIns="22000" rIns="22000" tIns="8000" bIns="8000" anchor="t">
-            <a:spAutoFit/>
-          </a:bodyPr>
-          <a:lstStyle/>
-          <a:p>
-            <a:pPr algn="l">
-              <a:lnSpc>
-                <a:spcPct val="150000"/>
-              </a:lnSpc>
-              <a:spcBef>
-                <a:spcPts val="0"/>
-              </a:spcBef>
-              <a:spcAft>
-                <a:spcPts val="0"/>
-              </a:spcAft>
-            </a:pPr>
-            <a:r>
-              <a:rPr sz="3200" b="1">
+              <a:t>Next steps: </a:t>
+            </a:r>
+            <a:r>
+              <a:rPr sz="2800" b="1">
                 <a:solidFill>
                   <a:srgbClr val="0A1F2E"/>
                 </a:solidFill>
@@ -13762,13 +13546,13 @@
       </p:sp>
       <p:sp>
         <p:nvSpPr>
-          <p:cNvPr id="9" name="Rounded Rectangle 8"/>
+          <p:cNvPr id="8" name="Rounded Rectangle 7"/>
           <p:cNvSpPr/>
           <p:nvPr/>
         </p:nvSpPr>
         <p:spPr>
           <a:xfrm>
-            <a:off x="502920" y="1097280"/>
+            <a:off x="502920" y="960120"/>
             <a:ext cx="2673019" cy="2148840"/>
           </a:xfrm>
           <a:prstGeom prst="roundRect">
@@ -13810,13 +13594,13 @@
       </p:sp>
       <p:sp>
         <p:nvSpPr>
-          <p:cNvPr id="10" name="Rectangle 9"/>
+          <p:cNvPr id="9" name="Rectangle 8"/>
           <p:cNvSpPr/>
           <p:nvPr/>
         </p:nvSpPr>
         <p:spPr>
           <a:xfrm>
-            <a:off x="502920" y="1097280"/>
+            <a:off x="502920" y="960120"/>
             <a:ext cx="2673019" cy="868680"/>
           </a:xfrm>
           <a:prstGeom prst="rect">
@@ -13854,13 +13638,13 @@
       </p:sp>
       <p:sp>
         <p:nvSpPr>
-          <p:cNvPr id="11" name="TextBox 10"/>
+          <p:cNvPr id="10" name="TextBox 9"/>
           <p:cNvSpPr txBox="1"/>
           <p:nvPr/>
         </p:nvSpPr>
         <p:spPr>
           <a:xfrm>
-            <a:off x="630936" y="1261872"/>
+            <a:off x="630936" y="1124712"/>
             <a:ext cx="2416987" cy="292608"/>
           </a:xfrm>
           <a:prstGeom prst="rect">
@@ -13899,13 +13683,13 @@
       </p:sp>
       <p:sp>
         <p:nvSpPr>
-          <p:cNvPr id="12" name="TextBox 11"/>
+          <p:cNvPr id="11" name="TextBox 10"/>
           <p:cNvSpPr txBox="1"/>
           <p:nvPr/>
         </p:nvSpPr>
         <p:spPr>
           <a:xfrm>
-            <a:off x="630936" y="1554480"/>
+            <a:off x="630936" y="1417320"/>
             <a:ext cx="2416987" cy="329184"/>
           </a:xfrm>
           <a:prstGeom prst="rect">
@@ -13944,13 +13728,13 @@
       </p:sp>
       <p:sp>
         <p:nvSpPr>
-          <p:cNvPr id="13" name="TextBox 12"/>
+          <p:cNvPr id="12" name="TextBox 11"/>
           <p:cNvSpPr txBox="1"/>
           <p:nvPr/>
         </p:nvSpPr>
         <p:spPr>
           <a:xfrm>
-            <a:off x="630936" y="2148839"/>
+            <a:off x="630936" y="2011680"/>
             <a:ext cx="2416987" cy="914400"/>
           </a:xfrm>
           <a:prstGeom prst="rect">
@@ -13989,13 +13773,13 @@
       </p:sp>
       <p:sp>
         <p:nvSpPr>
-          <p:cNvPr id="14" name="Rounded Rectangle 13"/>
+          <p:cNvPr id="13" name="Rounded Rectangle 12"/>
           <p:cNvSpPr/>
           <p:nvPr/>
         </p:nvSpPr>
         <p:spPr>
           <a:xfrm>
-            <a:off x="3340531" y="1097280"/>
+            <a:off x="3340531" y="960120"/>
             <a:ext cx="2673019" cy="2148840"/>
           </a:xfrm>
           <a:prstGeom prst="roundRect">
@@ -14037,13 +13821,13 @@
       </p:sp>
       <p:sp>
         <p:nvSpPr>
-          <p:cNvPr id="15" name="Rectangle 14"/>
+          <p:cNvPr id="14" name="Rectangle 13"/>
           <p:cNvSpPr/>
           <p:nvPr/>
         </p:nvSpPr>
         <p:spPr>
           <a:xfrm>
-            <a:off x="3340531" y="1097280"/>
+            <a:off x="3340531" y="960120"/>
             <a:ext cx="2673019" cy="868680"/>
           </a:xfrm>
           <a:prstGeom prst="rect">
@@ -14081,13 +13865,13 @@
       </p:sp>
       <p:sp>
         <p:nvSpPr>
-          <p:cNvPr id="16" name="TextBox 15"/>
+          <p:cNvPr id="15" name="TextBox 14"/>
           <p:cNvSpPr txBox="1"/>
           <p:nvPr/>
         </p:nvSpPr>
         <p:spPr>
           <a:xfrm>
-            <a:off x="3468547" y="1261872"/>
+            <a:off x="3468547" y="1124712"/>
             <a:ext cx="2416987" cy="292608"/>
           </a:xfrm>
           <a:prstGeom prst="rect">
@@ -14126,13 +13910,13 @@
       </p:sp>
       <p:sp>
         <p:nvSpPr>
-          <p:cNvPr id="17" name="TextBox 16"/>
+          <p:cNvPr id="16" name="TextBox 15"/>
           <p:cNvSpPr txBox="1"/>
           <p:nvPr/>
         </p:nvSpPr>
         <p:spPr>
           <a:xfrm>
-            <a:off x="3468547" y="1554480"/>
+            <a:off x="3468547" y="1417320"/>
             <a:ext cx="2416987" cy="329184"/>
           </a:xfrm>
           <a:prstGeom prst="rect">
@@ -14171,13 +13955,13 @@
       </p:sp>
       <p:sp>
         <p:nvSpPr>
-          <p:cNvPr id="18" name="TextBox 17"/>
+          <p:cNvPr id="17" name="TextBox 16"/>
           <p:cNvSpPr txBox="1"/>
           <p:nvPr/>
         </p:nvSpPr>
         <p:spPr>
           <a:xfrm>
-            <a:off x="3468547" y="2148839"/>
+            <a:off x="3468547" y="2011680"/>
             <a:ext cx="2416987" cy="914400"/>
           </a:xfrm>
           <a:prstGeom prst="rect">
@@ -14216,13 +14000,13 @@
       </p:sp>
       <p:sp>
         <p:nvSpPr>
-          <p:cNvPr id="19" name="Rounded Rectangle 18"/>
+          <p:cNvPr id="18" name="Rounded Rectangle 17"/>
           <p:cNvSpPr/>
           <p:nvPr/>
         </p:nvSpPr>
         <p:spPr>
           <a:xfrm>
-            <a:off x="6178143" y="1097280"/>
+            <a:off x="6178143" y="960120"/>
             <a:ext cx="2673019" cy="2148840"/>
           </a:xfrm>
           <a:prstGeom prst="roundRect">
@@ -14264,13 +14048,13 @@
       </p:sp>
       <p:sp>
         <p:nvSpPr>
-          <p:cNvPr id="20" name="Rectangle 19"/>
+          <p:cNvPr id="19" name="Rectangle 18"/>
           <p:cNvSpPr/>
           <p:nvPr/>
         </p:nvSpPr>
         <p:spPr>
           <a:xfrm>
-            <a:off x="6178143" y="1097280"/>
+            <a:off x="6178143" y="960120"/>
             <a:ext cx="2673019" cy="868680"/>
           </a:xfrm>
           <a:prstGeom prst="rect">
@@ -14308,13 +14092,13 @@
       </p:sp>
       <p:sp>
         <p:nvSpPr>
-          <p:cNvPr id="21" name="TextBox 20"/>
+          <p:cNvPr id="20" name="TextBox 19"/>
           <p:cNvSpPr txBox="1"/>
           <p:nvPr/>
         </p:nvSpPr>
         <p:spPr>
           <a:xfrm>
-            <a:off x="6306159" y="1261872"/>
+            <a:off x="6306159" y="1124712"/>
             <a:ext cx="2416987" cy="292608"/>
           </a:xfrm>
           <a:prstGeom prst="rect">
@@ -14353,13 +14137,13 @@
       </p:sp>
       <p:sp>
         <p:nvSpPr>
-          <p:cNvPr id="22" name="TextBox 21"/>
+          <p:cNvPr id="21" name="TextBox 20"/>
           <p:cNvSpPr txBox="1"/>
           <p:nvPr/>
         </p:nvSpPr>
         <p:spPr>
           <a:xfrm>
-            <a:off x="6306159" y="1554480"/>
+            <a:off x="6306159" y="1417320"/>
             <a:ext cx="2416987" cy="329184"/>
           </a:xfrm>
           <a:prstGeom prst="rect">
@@ -14398,13 +14182,13 @@
       </p:sp>
       <p:sp>
         <p:nvSpPr>
-          <p:cNvPr id="23" name="TextBox 22"/>
+          <p:cNvPr id="22" name="TextBox 21"/>
           <p:cNvSpPr txBox="1"/>
           <p:nvPr/>
         </p:nvSpPr>
         <p:spPr>
           <a:xfrm>
-            <a:off x="6306159" y="2148839"/>
+            <a:off x="6306159" y="2011680"/>
             <a:ext cx="2416987" cy="914400"/>
           </a:xfrm>
           <a:prstGeom prst="rect">
@@ -14443,13 +14227,13 @@
       </p:sp>
       <p:sp>
         <p:nvSpPr>
-          <p:cNvPr id="24" name="Rounded Rectangle 23"/>
+          <p:cNvPr id="23" name="Rounded Rectangle 22"/>
           <p:cNvSpPr/>
           <p:nvPr/>
         </p:nvSpPr>
         <p:spPr>
           <a:xfrm>
-            <a:off x="9015755" y="1097280"/>
+            <a:off x="9015755" y="960120"/>
             <a:ext cx="2673019" cy="2148840"/>
           </a:xfrm>
           <a:prstGeom prst="roundRect">
@@ -14491,13 +14275,13 @@
       </p:sp>
       <p:sp>
         <p:nvSpPr>
-          <p:cNvPr id="25" name="Rectangle 24"/>
+          <p:cNvPr id="24" name="Rectangle 23"/>
           <p:cNvSpPr/>
           <p:nvPr/>
         </p:nvSpPr>
         <p:spPr>
           <a:xfrm>
-            <a:off x="9015755" y="1097280"/>
+            <a:off x="9015755" y="960120"/>
             <a:ext cx="2673019" cy="868680"/>
           </a:xfrm>
           <a:prstGeom prst="rect">
@@ -14535,13 +14319,13 @@
       </p:sp>
       <p:sp>
         <p:nvSpPr>
-          <p:cNvPr id="26" name="TextBox 25"/>
+          <p:cNvPr id="25" name="TextBox 24"/>
           <p:cNvSpPr txBox="1"/>
           <p:nvPr/>
         </p:nvSpPr>
         <p:spPr>
           <a:xfrm>
-            <a:off x="9143771" y="1261872"/>
+            <a:off x="9143771" y="1124712"/>
             <a:ext cx="2416987" cy="292608"/>
           </a:xfrm>
           <a:prstGeom prst="rect">
@@ -14580,13 +14364,13 @@
       </p:sp>
       <p:sp>
         <p:nvSpPr>
-          <p:cNvPr id="27" name="TextBox 26"/>
+          <p:cNvPr id="26" name="TextBox 25"/>
           <p:cNvSpPr txBox="1"/>
           <p:nvPr/>
         </p:nvSpPr>
         <p:spPr>
           <a:xfrm>
-            <a:off x="9143771" y="1554480"/>
+            <a:off x="9143771" y="1417320"/>
             <a:ext cx="2416987" cy="329184"/>
           </a:xfrm>
           <a:prstGeom prst="rect">
@@ -14625,13 +14409,13 @@
       </p:sp>
       <p:sp>
         <p:nvSpPr>
-          <p:cNvPr id="28" name="TextBox 27"/>
+          <p:cNvPr id="27" name="TextBox 26"/>
           <p:cNvSpPr txBox="1"/>
           <p:nvPr/>
         </p:nvSpPr>
         <p:spPr>
           <a:xfrm>
-            <a:off x="9143771" y="2148839"/>
+            <a:off x="9143771" y="2011680"/>
             <a:ext cx="2416987" cy="914400"/>
           </a:xfrm>
           <a:prstGeom prst="rect">
@@ -14670,14 +14454,14 @@
       </p:sp>
       <p:sp>
         <p:nvSpPr>
-          <p:cNvPr id="29" name="Rounded Rectangle 28"/>
+          <p:cNvPr id="28" name="Rounded Rectangle 27"/>
           <p:cNvSpPr/>
           <p:nvPr/>
         </p:nvSpPr>
         <p:spPr>
           <a:xfrm>
-            <a:off x="502920" y="3447288"/>
-            <a:ext cx="11185855" cy="2606040"/>
+            <a:off x="502920" y="3310128"/>
+            <a:ext cx="11185855" cy="2743199"/>
           </a:xfrm>
           <a:prstGeom prst="roundRect">
             <a:avLst>
@@ -14718,13 +14502,13 @@
       </p:sp>
       <p:sp>
         <p:nvSpPr>
-          <p:cNvPr id="30" name="TextBox 29"/>
+          <p:cNvPr id="29" name="TextBox 28"/>
           <p:cNvSpPr txBox="1"/>
           <p:nvPr/>
         </p:nvSpPr>
         <p:spPr>
           <a:xfrm>
-            <a:off x="822960" y="3593592"/>
+            <a:off x="822960" y="3456432"/>
             <a:ext cx="10545775" cy="365760"/>
           </a:xfrm>
           <a:prstGeom prst="rect">
@@ -14763,14 +14547,14 @@
       </p:sp>
       <p:sp>
         <p:nvSpPr>
-          <p:cNvPr id="31" name="TextBox 30"/>
+          <p:cNvPr id="30" name="TextBox 29"/>
           <p:cNvSpPr txBox="1"/>
           <p:nvPr/>
         </p:nvSpPr>
         <p:spPr>
           <a:xfrm>
-            <a:off x="822960" y="3995928"/>
-            <a:ext cx="10545775" cy="1920240"/>
+            <a:off x="822960" y="3858768"/>
+            <a:ext cx="10545775" cy="2057399"/>
           </a:xfrm>
           <a:prstGeom prst="rect">
             <a:avLst/>
@@ -14791,11 +14575,11 @@
                 <a:spcPts val="400"/>
               </a:spcBef>
               <a:spcAft>
-                <a:spcPts val="1400"/>
+                <a:spcPts val="1600"/>
               </a:spcAft>
             </a:pPr>
             <a:r>
-              <a:rPr sz="2000" b="0">
+              <a:rPr sz="2100" b="0">
                 <a:solidFill>
                   <a:srgbClr val="1E2F38"/>
                 </a:solidFill>
@@ -14813,11 +14597,11 @@
                 <a:spcPts val="400"/>
               </a:spcBef>
               <a:spcAft>
-                <a:spcPts val="1400"/>
+                <a:spcPts val="1600"/>
               </a:spcAft>
             </a:pPr>
             <a:r>
-              <a:rPr sz="2000" b="0">
+              <a:rPr sz="2100" b="0">
                 <a:solidFill>
                   <a:srgbClr val="1E2F38"/>
                 </a:solidFill>
@@ -14835,11 +14619,11 @@
                 <a:spcPts val="400"/>
               </a:spcBef>
               <a:spcAft>
-                <a:spcPts val="1400"/>
+                <a:spcPts val="1600"/>
               </a:spcAft>
             </a:pPr>
             <a:r>
-              <a:rPr sz="2000" b="0">
+              <a:rPr sz="2100" b="0">
                 <a:solidFill>
                   <a:srgbClr val="1E2F38"/>
                 </a:solidFill>
@@ -14852,7 +14636,7 @@
       </p:sp>
       <p:sp>
         <p:nvSpPr>
-          <p:cNvPr id="32" name="Rectangle 31"/>
+          <p:cNvPr id="31" name="Rectangle 30"/>
           <p:cNvSpPr/>
           <p:nvPr/>
         </p:nvSpPr>
@@ -14896,7 +14680,7 @@
       </p:sp>
       <p:sp>
         <p:nvSpPr>
-          <p:cNvPr id="33" name="TextBox 32"/>
+          <p:cNvPr id="32" name="TextBox 31"/>
           <p:cNvSpPr txBox="1"/>
           <p:nvPr/>
         </p:nvSpPr>
@@ -14941,7 +14725,7 @@
       </p:sp>
       <p:sp>
         <p:nvSpPr>
-          <p:cNvPr id="34" name="TextBox 33"/>
+          <p:cNvPr id="33" name="TextBox 32"/>
           <p:cNvSpPr txBox="1"/>
           <p:nvPr/>
         </p:nvSpPr>
